--- a/static/ppts/G7_Math_T4_Full_Revision.pptx
+++ b/static/ppts/G7_Math_T4_Full_Revision.pptx
@@ -15,12 +15,9 @@
     <p:sldId id="263" r:id="rId9"/>
     <p:sldId id="264" r:id="rId10"/>
     <p:sldId id="265" r:id="rId11"/>
-    <p:sldId id="266" r:id="rId12"/>
-    <p:sldId id="267" r:id="rId13"/>
-    <p:sldId id="268" r:id="rId14"/>
   </p:sldIdLst>
   <p:notesMasterIdLst>
-    <p:notesMasterId r:id="rId15"/>
+    <p:notesMasterId r:id="rId12"/>
   </p:notesMasterIdLst>
   <p:sldSz cx="9144000" cy="5143500"/>
   <p:notesSz cx="5143500" cy="9144000"/>
@@ -626,270 +623,6 @@
             <a:fld id="{F7021451-1387-4CA6-816F-3879F97B5CBC}" type="slidenum">
               <a:rPr lang="en-US"/>
               <a:t>10</a:t>
-            </a:fld>
-            <a:endParaRPr lang="en-US"/>
-          </a:p>
-        </p:txBody>
-      </p:sp>
-    </p:spTree>
-    <p:extLst>
-      <p:ext uri="{BB962C8B-B14F-4D97-AF65-F5344CB8AC3E}">
-        <p14:creationId xmlns:p14="http://schemas.microsoft.com/office/powerpoint/2010/main" val="1024086991"/>
-      </p:ext>
-    </p:extLst>
-  </p:cSld>
-  <p:clrMapOvr>
-    <a:masterClrMapping/>
-  </p:clrMapOvr>
-</p:notes>
-</file>
-
-<file path=ppt/notesSlides/notesSlide11.xml><?xml version="1.0" encoding="utf-8"?>
-<p:notes xmlns:a="http://schemas.openxmlformats.org/drawingml/2006/main" xmlns:r="http://schemas.openxmlformats.org/officeDocument/2006/relationships" xmlns:p="http://schemas.openxmlformats.org/presentationml/2006/main">
-  <p:cSld>
-    <p:spTree>
-      <p:nvGrpSpPr>
-        <p:cNvPr id="1" name=""/>
-        <p:cNvGrpSpPr/>
-        <p:nvPr/>
-      </p:nvGrpSpPr>
-      <p:grpSpPr>
-        <a:xfrm>
-          <a:off x="0" y="0"/>
-          <a:ext cx="0" cy="0"/>
-          <a:chOff x="0" y="0"/>
-          <a:chExt cx="0" cy="0"/>
-        </a:xfrm>
-      </p:grpSpPr>
-      <p:sp>
-        <p:nvSpPr>
-          <p:cNvPr id="2" name="Slide Image Placeholder 1"/>
-          <p:cNvSpPr>
-            <a:spLocks noGrp="1" noRot="1" noChangeAspect="1"/>
-          </p:cNvSpPr>
-          <p:nvPr>
-            <p:ph type="sldImg"/>
-          </p:nvPr>
-        </p:nvSpPr>
-        <p:spPr/>
-      </p:sp>
-      <p:sp>
-        <p:nvSpPr>
-          <p:cNvPr id="3" name="Notes Placeholder 2"/>
-          <p:cNvSpPr>
-            <a:spLocks noGrp="1"/>
-          </p:cNvSpPr>
-          <p:nvPr>
-            <p:ph type="body" idx="1"/>
-          </p:nvPr>
-        </p:nvSpPr>
-        <p:spPr/>
-        <p:txBody>
-          <a:bodyPr/>
-          <a:lstStyle/>
-          <a:p>
-            <a:r>
-              <a:rPr lang="en-US" dirty="0"/>
-              <a:t/>
-            </a:r>
-            <a:endParaRPr lang="en-US" dirty="0"/>
-          </a:p>
-        </p:txBody>
-      </p:sp>
-      <p:sp>
-        <p:nvSpPr>
-          <p:cNvPr id="4" name="Slide Number Placeholder 3"/>
-          <p:cNvSpPr>
-            <a:spLocks noGrp="1"/>
-          </p:cNvSpPr>
-          <p:nvPr>
-            <p:ph type="sldNum" sz="quarter" idx="10"/>
-          </p:nvPr>
-        </p:nvSpPr>
-        <p:spPr/>
-        <p:txBody>
-          <a:bodyPr/>
-          <a:lstStyle/>
-          <a:p>
-            <a:fld id="{F7021451-1387-4CA6-816F-3879F97B5CBC}" type="slidenum">
-              <a:rPr lang="en-US"/>
-              <a:t>11</a:t>
-            </a:fld>
-            <a:endParaRPr lang="en-US"/>
-          </a:p>
-        </p:txBody>
-      </p:sp>
-    </p:spTree>
-    <p:extLst>
-      <p:ext uri="{BB962C8B-B14F-4D97-AF65-F5344CB8AC3E}">
-        <p14:creationId xmlns:p14="http://schemas.microsoft.com/office/powerpoint/2010/main" val="1024086991"/>
-      </p:ext>
-    </p:extLst>
-  </p:cSld>
-  <p:clrMapOvr>
-    <a:masterClrMapping/>
-  </p:clrMapOvr>
-</p:notes>
-</file>
-
-<file path=ppt/notesSlides/notesSlide12.xml><?xml version="1.0" encoding="utf-8"?>
-<p:notes xmlns:a="http://schemas.openxmlformats.org/drawingml/2006/main" xmlns:r="http://schemas.openxmlformats.org/officeDocument/2006/relationships" xmlns:p="http://schemas.openxmlformats.org/presentationml/2006/main">
-  <p:cSld>
-    <p:spTree>
-      <p:nvGrpSpPr>
-        <p:cNvPr id="1" name=""/>
-        <p:cNvGrpSpPr/>
-        <p:nvPr/>
-      </p:nvGrpSpPr>
-      <p:grpSpPr>
-        <a:xfrm>
-          <a:off x="0" y="0"/>
-          <a:ext cx="0" cy="0"/>
-          <a:chOff x="0" y="0"/>
-          <a:chExt cx="0" cy="0"/>
-        </a:xfrm>
-      </p:grpSpPr>
-      <p:sp>
-        <p:nvSpPr>
-          <p:cNvPr id="2" name="Slide Image Placeholder 1"/>
-          <p:cNvSpPr>
-            <a:spLocks noGrp="1" noRot="1" noChangeAspect="1"/>
-          </p:cNvSpPr>
-          <p:nvPr>
-            <p:ph type="sldImg"/>
-          </p:nvPr>
-        </p:nvSpPr>
-        <p:spPr/>
-      </p:sp>
-      <p:sp>
-        <p:nvSpPr>
-          <p:cNvPr id="3" name="Notes Placeholder 2"/>
-          <p:cNvSpPr>
-            <a:spLocks noGrp="1"/>
-          </p:cNvSpPr>
-          <p:nvPr>
-            <p:ph type="body" idx="1"/>
-          </p:nvPr>
-        </p:nvSpPr>
-        <p:spPr/>
-        <p:txBody>
-          <a:bodyPr/>
-          <a:lstStyle/>
-          <a:p>
-            <a:r>
-              <a:rPr lang="en-US" dirty="0"/>
-              <a:t/>
-            </a:r>
-            <a:endParaRPr lang="en-US" dirty="0"/>
-          </a:p>
-        </p:txBody>
-      </p:sp>
-      <p:sp>
-        <p:nvSpPr>
-          <p:cNvPr id="4" name="Slide Number Placeholder 3"/>
-          <p:cNvSpPr>
-            <a:spLocks noGrp="1"/>
-          </p:cNvSpPr>
-          <p:nvPr>
-            <p:ph type="sldNum" sz="quarter" idx="10"/>
-          </p:nvPr>
-        </p:nvSpPr>
-        <p:spPr/>
-        <p:txBody>
-          <a:bodyPr/>
-          <a:lstStyle/>
-          <a:p>
-            <a:fld id="{F7021451-1387-4CA6-816F-3879F97B5CBC}" type="slidenum">
-              <a:rPr lang="en-US"/>
-              <a:t>12</a:t>
-            </a:fld>
-            <a:endParaRPr lang="en-US"/>
-          </a:p>
-        </p:txBody>
-      </p:sp>
-    </p:spTree>
-    <p:extLst>
-      <p:ext uri="{BB962C8B-B14F-4D97-AF65-F5344CB8AC3E}">
-        <p14:creationId xmlns:p14="http://schemas.microsoft.com/office/powerpoint/2010/main" val="1024086991"/>
-      </p:ext>
-    </p:extLst>
-  </p:cSld>
-  <p:clrMapOvr>
-    <a:masterClrMapping/>
-  </p:clrMapOvr>
-</p:notes>
-</file>
-
-<file path=ppt/notesSlides/notesSlide13.xml><?xml version="1.0" encoding="utf-8"?>
-<p:notes xmlns:a="http://schemas.openxmlformats.org/drawingml/2006/main" xmlns:r="http://schemas.openxmlformats.org/officeDocument/2006/relationships" xmlns:p="http://schemas.openxmlformats.org/presentationml/2006/main">
-  <p:cSld>
-    <p:spTree>
-      <p:nvGrpSpPr>
-        <p:cNvPr id="1" name=""/>
-        <p:cNvGrpSpPr/>
-        <p:nvPr/>
-      </p:nvGrpSpPr>
-      <p:grpSpPr>
-        <a:xfrm>
-          <a:off x="0" y="0"/>
-          <a:ext cx="0" cy="0"/>
-          <a:chOff x="0" y="0"/>
-          <a:chExt cx="0" cy="0"/>
-        </a:xfrm>
-      </p:grpSpPr>
-      <p:sp>
-        <p:nvSpPr>
-          <p:cNvPr id="2" name="Slide Image Placeholder 1"/>
-          <p:cNvSpPr>
-            <a:spLocks noGrp="1" noRot="1" noChangeAspect="1"/>
-          </p:cNvSpPr>
-          <p:nvPr>
-            <p:ph type="sldImg"/>
-          </p:nvPr>
-        </p:nvSpPr>
-        <p:spPr/>
-      </p:sp>
-      <p:sp>
-        <p:nvSpPr>
-          <p:cNvPr id="3" name="Notes Placeholder 2"/>
-          <p:cNvSpPr>
-            <a:spLocks noGrp="1"/>
-          </p:cNvSpPr>
-          <p:nvPr>
-            <p:ph type="body" idx="1"/>
-          </p:nvPr>
-        </p:nvSpPr>
-        <p:spPr/>
-        <p:txBody>
-          <a:bodyPr/>
-          <a:lstStyle/>
-          <a:p>
-            <a:r>
-              <a:rPr lang="en-US" dirty="0"/>
-              <a:t/>
-            </a:r>
-            <a:endParaRPr lang="en-US" dirty="0"/>
-          </a:p>
-        </p:txBody>
-      </p:sp>
-      <p:sp>
-        <p:nvSpPr>
-          <p:cNvPr id="4" name="Slide Number Placeholder 3"/>
-          <p:cNvSpPr>
-            <a:spLocks noGrp="1"/>
-          </p:cNvSpPr>
-          <p:nvPr>
-            <p:ph type="sldNum" sz="quarter" idx="10"/>
-          </p:nvPr>
-        </p:nvSpPr>
-        <p:spPr/>
-        <p:txBody>
-          <a:bodyPr/>
-          <a:lstStyle/>
-          <a:p>
-            <a:fld id="{F7021451-1387-4CA6-816F-3879F97B5CBC}" type="slidenum">
-              <a:rPr lang="en-US"/>
-              <a:t>13</a:t>
             </a:fld>
             <a:endParaRPr lang="en-US"/>
           </a:p>
@@ -1922,13 +1655,6 @@
 <file path=ppt/slides/slide1.xml><?xml version="1.0" encoding="utf-8"?>
 <p:sld xmlns:a="http://schemas.openxmlformats.org/drawingml/2006/main" xmlns:r="http://schemas.openxmlformats.org/officeDocument/2006/relationships" xmlns:p="http://schemas.openxmlformats.org/presentationml/2006/main">
   <p:cSld name="Slide 1">
-    <p:bg>
-      <p:bgPr>
-        <a:solidFill>
-          <a:srgbClr val="1B2A4A"/>
-        </a:solidFill>
-      </p:bgPr>
-    </p:bg>
     <p:spTree>
       <p:nvGrpSpPr>
         <p:cNvPr id="1" name=""/>
@@ -1951,8 +1677,28 @@
         </p:nvSpPr>
         <p:spPr>
           <a:xfrm>
-            <a:off x="0" y="4389120"/>
-            <a:ext cx="9144000" cy="54864"/>
+            <a:off x="0" y="0"/>
+            <a:ext cx="9144000" cy="5143500"/>
+          </a:xfrm>
+          <a:prstGeom prst="rect">
+            <a:avLst/>
+          </a:prstGeom>
+          <a:solidFill>
+            <a:srgbClr val="1B2A4A"/>
+          </a:solidFill>
+          <a:ln/>
+        </p:spPr>
+      </p:sp>
+      <p:sp>
+        <p:nvSpPr>
+          <p:cNvPr id="3" name="Shape 1"/>
+          <p:cNvSpPr/>
+          <p:nvPr/>
+        </p:nvSpPr>
+        <p:spPr>
+          <a:xfrm>
+            <a:off x="0" y="4777740"/>
+            <a:ext cx="9144000" cy="365760"/>
           </a:xfrm>
           <a:prstGeom prst="rect">
             <a:avLst/>
@@ -1965,36 +1711,14 @@
       </p:sp>
       <p:sp>
         <p:nvSpPr>
-          <p:cNvPr id="3" name="Shape 1"/>
-          <p:cNvSpPr/>
-          <p:nvPr/>
-        </p:nvSpPr>
-        <p:spPr>
-          <a:xfrm>
-            <a:off x="457200" y="365760"/>
-            <a:ext cx="1097280" cy="365760"/>
-          </a:xfrm>
-          <a:prstGeom prst="roundRect">
-            <a:avLst>
-              <a:gd name="adj" fmla="val 25000"/>
-            </a:avLst>
-          </a:prstGeom>
-          <a:solidFill>
-            <a:srgbClr val="C8372D"/>
-          </a:solidFill>
-          <a:ln/>
-        </p:spPr>
-      </p:sp>
-      <p:sp>
-        <p:nvSpPr>
           <p:cNvPr id="4" name="Text 2"/>
           <p:cNvSpPr/>
           <p:nvPr/>
         </p:nvSpPr>
         <p:spPr>
           <a:xfrm>
-            <a:off x="457200" y="365760"/>
-            <a:ext cx="1097280" cy="365760"/>
+            <a:off x="731520" y="1097280"/>
+            <a:ext cx="7680960" cy="457200"/>
           </a:xfrm>
           <a:prstGeom prst="rect">
             <a:avLst/>
@@ -2006,21 +1730,21 @@
           <a:bodyPr wrap="square" rtlCol="0" anchor="ctr"/>
           <a:lstStyle/>
           <a:p>
-            <a:pPr algn="ctr" indent="0" marL="0">
+            <a:pPr indent="0" marL="0">
               <a:buNone/>
             </a:pPr>
             <a:r>
-              <a:rPr lang="en-US" sz="1000" b="1" dirty="0">
+              <a:rPr lang="en-US" sz="1400" b="1" spc="400" kern="0" dirty="0">
                 <a:solidFill>
-                  <a:srgbClr val="FFFFFF"/>
+                  <a:srgbClr val="C8372D"/>
                 </a:solidFill>
                 <a:latin typeface="Calibri" pitchFamily="34" charset="0"/>
                 <a:ea typeface="Calibri" pitchFamily="34" charset="-122"/>
                 <a:cs typeface="Calibri" pitchFamily="34" charset="-120"/>
               </a:rPr>
-              <a:t>MR ZOCCHI</a:t>
+              <a:t>GRADE 7 MATHEMATICS</a:t>
             </a:r>
-            <a:endParaRPr lang="en-US" sz="1000" dirty="0"/>
+            <a:endParaRPr lang="en-US" sz="1400" dirty="0"/>
           </a:p>
         </p:txBody>
       </p:sp>
@@ -2032,8 +1756,8 @@
         </p:nvSpPr>
         <p:spPr>
           <a:xfrm>
-            <a:off x="457200" y="1371600"/>
-            <a:ext cx="8229600" cy="1828800"/>
+            <a:off x="731520" y="1645920"/>
+            <a:ext cx="7680960" cy="1463040"/>
           </a:xfrm>
           <a:prstGeom prst="rect">
             <a:avLst/>
@@ -2049,7 +1773,7 @@
               <a:buNone/>
             </a:pPr>
             <a:r>
-              <a:rPr lang="en-US" sz="3600" b="1" dirty="0">
+              <a:rPr lang="en-US" sz="4000" b="1" dirty="0">
                 <a:solidFill>
                   <a:srgbClr val="FFFFFF"/>
                 </a:solidFill>
@@ -2057,9 +1781,26 @@
                 <a:ea typeface="Georgia" pitchFamily="34" charset="-122"/>
                 <a:cs typeface="Georgia" pitchFamily="34" charset="-120"/>
               </a:rPr>
-              <a:t>Revision</a:t>
+              <a:t>Algebra</a:t>
             </a:r>
-            <a:endParaRPr lang="en-US" sz="3600" dirty="0"/>
+            <a:endParaRPr lang="en-US" sz="4000" dirty="0"/>
+          </a:p>
+          <a:p>
+            <a:pPr indent="0" marL="0">
+              <a:buNone/>
+            </a:pPr>
+            <a:r>
+              <a:rPr lang="en-US" sz="4000" b="1" dirty="0">
+                <a:solidFill>
+                  <a:srgbClr val="FFFFFF"/>
+                </a:solidFill>
+                <a:latin typeface="Georgia" pitchFamily="34" charset="0"/>
+                <a:ea typeface="Georgia" pitchFamily="34" charset="-122"/>
+                <a:cs typeface="Georgia" pitchFamily="34" charset="-120"/>
+              </a:rPr>
+              <a:t>Full Revision</a:t>
+            </a:r>
+            <a:endParaRPr lang="en-US" sz="4000" dirty="0"/>
           </a:p>
         </p:txBody>
       </p:sp>
@@ -2071,8 +1812,8 @@
         </p:nvSpPr>
         <p:spPr>
           <a:xfrm>
-            <a:off x="457200" y="3840480"/>
-            <a:ext cx="3657600" cy="457200"/>
+            <a:off x="731520" y="3200400"/>
+            <a:ext cx="7680960" cy="548640"/>
           </a:xfrm>
           <a:prstGeom prst="rect">
             <a:avLst/>
@@ -2088,17 +1829,56 @@
               <a:buNone/>
             </a:pPr>
             <a:r>
-              <a:rPr lang="en-US" sz="1400" i="1" dirty="0">
+              <a:rPr lang="en-US" sz="1600" i="1" dirty="0">
                 <a:solidFill>
-                  <a:srgbClr val="E9C46A"/>
+                  <a:srgbClr val="9B9690"/>
                 </a:solidFill>
                 <a:latin typeface="Calibri" pitchFamily="34" charset="0"/>
                 <a:ea typeface="Calibri" pitchFamily="34" charset="-122"/>
                 <a:cs typeface="Calibri" pitchFamily="34" charset="-120"/>
               </a:rPr>
-              <a:t>mrzocchi.com</a:t>
+              <a:t>Expressions, Equations, Inequalities, Sequences &amp; Graphs</a:t>
             </a:r>
-            <a:endParaRPr lang="en-US" sz="1400" dirty="0"/>
+            <a:endParaRPr lang="en-US" sz="1600" dirty="0"/>
+          </a:p>
+        </p:txBody>
+      </p:sp>
+      <p:sp>
+        <p:nvSpPr>
+          <p:cNvPr id="7" name="Text 5"/>
+          <p:cNvSpPr/>
+          <p:nvPr/>
+        </p:nvSpPr>
+        <p:spPr>
+          <a:xfrm>
+            <a:off x="731520" y="4206240"/>
+            <a:ext cx="3657600" cy="365760"/>
+          </a:xfrm>
+          <a:prstGeom prst="rect">
+            <a:avLst/>
+          </a:prstGeom>
+          <a:noFill/>
+          <a:ln/>
+        </p:spPr>
+        <p:txBody>
+          <a:bodyPr wrap="square" rtlCol="0" anchor="ctr"/>
+          <a:lstStyle/>
+          <a:p>
+            <a:pPr indent="0" marL="0">
+              <a:buNone/>
+            </a:pPr>
+            <a:r>
+              <a:rPr lang="en-US" sz="1200" dirty="0">
+                <a:solidFill>
+                  <a:srgbClr val="6B6660"/>
+                </a:solidFill>
+                <a:latin typeface="Calibri" pitchFamily="34" charset="0"/>
+                <a:ea typeface="Calibri" pitchFamily="34" charset="-122"/>
+                <a:cs typeface="Calibri" pitchFamily="34" charset="-120"/>
+              </a:rPr>
+              <a:t>Mr Zocchi</a:t>
+            </a:r>
+            <a:endParaRPr lang="en-US" sz="1200" dirty="0"/>
           </a:p>
         </p:txBody>
       </p:sp>
@@ -2136,7 +1916,27 @@
         <p:spPr>
           <a:xfrm>
             <a:off x="0" y="0"/>
-            <a:ext cx="9144000" cy="54864"/>
+            <a:ext cx="9144000" cy="5143500"/>
+          </a:xfrm>
+          <a:prstGeom prst="rect">
+            <a:avLst/>
+          </a:prstGeom>
+          <a:solidFill>
+            <a:srgbClr val="1B2A4A"/>
+          </a:solidFill>
+          <a:ln/>
+        </p:spPr>
+      </p:sp>
+      <p:sp>
+        <p:nvSpPr>
+          <p:cNvPr id="3" name="Shape 1"/>
+          <p:cNvSpPr/>
+          <p:nvPr/>
+        </p:nvSpPr>
+        <p:spPr>
+          <a:xfrm>
+            <a:off x="0" y="4777740"/>
+            <a:ext cx="9144000" cy="365760"/>
           </a:xfrm>
           <a:prstGeom prst="rect">
             <a:avLst/>
@@ -2149,900 +1949,14 @@
       </p:sp>
       <p:sp>
         <p:nvSpPr>
-          <p:cNvPr id="3" name="Text 1"/>
+          <p:cNvPr id="4" name="Text 2"/>
           <p:cNvSpPr/>
           <p:nvPr/>
         </p:nvSpPr>
         <p:spPr>
           <a:xfrm>
-            <a:off x="457200" y="228600"/>
-            <a:ext cx="8229600" cy="548640"/>
-          </a:xfrm>
-          <a:prstGeom prst="rect">
-            <a:avLst/>
-          </a:prstGeom>
-          <a:noFill/>
-          <a:ln/>
-        </p:spPr>
-        <p:txBody>
-          <a:bodyPr wrap="square" lIns="0" tIns="0" rIns="0" bIns="0" rtlCol="0" anchor="ctr"/>
-          <a:lstStyle/>
-          <a:p>
-            <a:pPr indent="0" marL="0">
-              <a:buNone/>
-            </a:pPr>
-            <a:r>
-              <a:rPr lang="en-US" sz="2400" b="1" dirty="0">
-                <a:solidFill>
-                  <a:srgbClr val="1B2A4A"/>
-                </a:solidFill>
-                <a:latin typeface="Georgia" pitchFamily="34" charset="0"/>
-                <a:ea typeface="Georgia" pitchFamily="34" charset="-122"/>
-                <a:cs typeface="Georgia" pitchFamily="34" charset="-120"/>
-              </a:rPr>
-              <a:t>Check Your Understanding</a:t>
-            </a:r>
-            <a:endParaRPr lang="en-US" sz="2400" dirty="0"/>
-          </a:p>
-        </p:txBody>
-      </p:sp>
-      <p:sp>
-        <p:nvSpPr>
-          <p:cNvPr id="4" name="Shape 2"/>
-          <p:cNvSpPr/>
-          <p:nvPr/>
-        </p:nvSpPr>
-        <p:spPr>
-          <a:xfrm>
-            <a:off x="457200" y="868680"/>
-            <a:ext cx="1828800" cy="27432"/>
-          </a:xfrm>
-          <a:prstGeom prst="rect">
-            <a:avLst/>
-          </a:prstGeom>
-          <a:solidFill>
-            <a:srgbClr val="C8372D"/>
-          </a:solidFill>
-          <a:ln/>
-        </p:spPr>
-      </p:sp>
-      <p:sp>
-        <p:nvSpPr>
-          <p:cNvPr id="5" name="Shape 3"/>
-          <p:cNvSpPr/>
-          <p:nvPr/>
-        </p:nvSpPr>
-        <p:spPr>
-          <a:xfrm>
-            <a:off x="457200" y="1188720"/>
-            <a:ext cx="8229600" cy="1371600"/>
-          </a:xfrm>
-          <a:prstGeom prst="roundRect">
-            <a:avLst>
-              <a:gd name="adj" fmla="val 10000"/>
-            </a:avLst>
-          </a:prstGeom>
-          <a:solidFill>
-            <a:srgbClr val="FAF8F5"/>
-          </a:solidFill>
-          <a:ln w="12700">
-            <a:solidFill>
-              <a:srgbClr val="E5E2DC"/>
-            </a:solidFill>
-            <a:prstDash val="solid"/>
-          </a:ln>
-        </p:spPr>
-      </p:sp>
-      <p:sp>
-        <p:nvSpPr>
-          <p:cNvPr id="6" name="Text 4"/>
-          <p:cNvSpPr/>
-          <p:nvPr/>
-        </p:nvSpPr>
-        <p:spPr>
-          <a:xfrm>
-            <a:off x="731520" y="1188720"/>
-            <a:ext cx="7680960" cy="1371600"/>
-          </a:xfrm>
-          <a:prstGeom prst="rect">
-            <a:avLst/>
-          </a:prstGeom>
-          <a:noFill/>
-          <a:ln/>
-        </p:spPr>
-        <p:txBody>
-          <a:bodyPr wrap="square" rtlCol="0" anchor="ctr"/>
-          <a:lstStyle/>
-          <a:p>
-            <a:pPr indent="0" marL="0">
-              <a:buNone/>
-            </a:pPr>
-            <a:r>
-              <a:rPr lang="en-US" sz="1800" b="1" dirty="0">
-                <a:solidFill>
-                  <a:srgbClr val="1B2A4A"/>
-                </a:solidFill>
-                <a:latin typeface="Georgia" pitchFamily="34" charset="0"/>
-                <a:ea typeface="Georgia" pitchFamily="34" charset="-122"/>
-                <a:cs typeface="Georgia" pitchFamily="34" charset="-120"/>
-              </a:rPr>
-              <a:t>❓  Expand and simplify: 3(x + 5) + 2(x − 1)</a:t>
-            </a:r>
-            <a:endParaRPr lang="en-US" sz="1800" dirty="0"/>
-          </a:p>
-        </p:txBody>
-      </p:sp>
-      <p:sp>
-        <p:nvSpPr>
-          <p:cNvPr id="7" name="Shape 5"/>
-          <p:cNvSpPr/>
-          <p:nvPr/>
-        </p:nvSpPr>
-        <p:spPr>
-          <a:xfrm>
-            <a:off x="457200" y="2926080"/>
-            <a:ext cx="8229600" cy="1463040"/>
-          </a:xfrm>
-          <a:prstGeom prst="roundRect">
-            <a:avLst>
-              <a:gd name="adj" fmla="val 9375"/>
-            </a:avLst>
-          </a:prstGeom>
-          <a:solidFill>
-            <a:srgbClr val="E8F5F3"/>
-          </a:solidFill>
-          <a:ln/>
-        </p:spPr>
-      </p:sp>
-      <p:sp>
-        <p:nvSpPr>
-          <p:cNvPr id="8" name="Shape 6"/>
-          <p:cNvSpPr/>
-          <p:nvPr/>
-        </p:nvSpPr>
-        <p:spPr>
-          <a:xfrm>
-            <a:off x="457200" y="2926080"/>
-            <a:ext cx="54864" cy="1463040"/>
-          </a:xfrm>
-          <a:prstGeom prst="rect">
-            <a:avLst/>
-          </a:prstGeom>
-          <a:solidFill>
-            <a:srgbClr val="C8372D"/>
-          </a:solidFill>
-          <a:ln/>
-        </p:spPr>
-      </p:sp>
-      <p:sp>
-        <p:nvSpPr>
-          <p:cNvPr id="9" name="Text 7"/>
-          <p:cNvSpPr/>
-          <p:nvPr/>
-        </p:nvSpPr>
-        <p:spPr>
-          <a:xfrm>
-            <a:off x="731520" y="2926080"/>
-            <a:ext cx="7680960" cy="1463040"/>
-          </a:xfrm>
-          <a:prstGeom prst="rect">
-            <a:avLst/>
-          </a:prstGeom>
-          <a:noFill/>
-          <a:ln/>
-        </p:spPr>
-        <p:txBody>
-          <a:bodyPr wrap="square" rtlCol="0" anchor="ctr"/>
-          <a:lstStyle/>
-          <a:p>
-            <a:pPr indent="0" marL="0">
-              <a:lnSpc>
-                <a:spcPct val="140000"/>
-              </a:lnSpc>
-              <a:buNone/>
-            </a:pPr>
-            <a:r>
-              <a:rPr lang="en-US" sz="1600" dirty="0">
-                <a:solidFill>
-                  <a:srgbClr val="3D3A36"/>
-                </a:solidFill>
-                <a:latin typeface="Calibri" pitchFamily="34" charset="0"/>
-                <a:ea typeface="Calibri" pitchFamily="34" charset="-122"/>
-                <a:cs typeface="Calibri" pitchFamily="34" charset="-120"/>
-              </a:rPr>
-              <a:t>3x + 15 + 2x − 2 = 5x + 13.</a:t>
-            </a:r>
-            <a:endParaRPr lang="en-US" sz="1600" dirty="0"/>
-          </a:p>
-        </p:txBody>
-      </p:sp>
-      <p:sp>
-        <p:nvSpPr>
-          <p:cNvPr id="10" name="Text 8"/>
-          <p:cNvSpPr/>
-          <p:nvPr/>
-        </p:nvSpPr>
-        <p:spPr>
-          <a:xfrm>
-            <a:off x="7315200" y="4754880"/>
-            <a:ext cx="1828800" cy="274320"/>
-          </a:xfrm>
-          <a:prstGeom prst="rect">
-            <a:avLst/>
-          </a:prstGeom>
-          <a:noFill/>
-          <a:ln/>
-        </p:spPr>
-        <p:txBody>
-          <a:bodyPr wrap="square" rtlCol="0" anchor="ctr"/>
-          <a:lstStyle/>
-          <a:p>
-            <a:pPr algn="r" indent="0" marL="0">
-              <a:buNone/>
-            </a:pPr>
-            <a:r>
-              <a:rPr lang="en-US" sz="900" dirty="0">
-                <a:solidFill>
-                  <a:srgbClr val="9B9690"/>
-                </a:solidFill>
-                <a:latin typeface="Calibri" pitchFamily="34" charset="0"/>
-                <a:ea typeface="Calibri" pitchFamily="34" charset="-122"/>
-                <a:cs typeface="Calibri" pitchFamily="34" charset="-120"/>
-              </a:rPr>
-              <a:t>mrzocchi.com</a:t>
-            </a:r>
-            <a:endParaRPr lang="en-US" sz="900" dirty="0"/>
-          </a:p>
-        </p:txBody>
-      </p:sp>
-    </p:spTree>
-  </p:cSld>
-  <p:clrMapOvr>
-    <a:masterClrMapping/>
-  </p:clrMapOvr>
-</p:sld>
-</file>
-
-<file path=ppt/slides/slide11.xml><?xml version="1.0" encoding="utf-8"?>
-<p:sld xmlns:a="http://schemas.openxmlformats.org/drawingml/2006/main" xmlns:r="http://schemas.openxmlformats.org/officeDocument/2006/relationships" xmlns:p="http://schemas.openxmlformats.org/presentationml/2006/main">
-  <p:cSld name="Slide 11">
-    <p:spTree>
-      <p:nvGrpSpPr>
-        <p:cNvPr id="1" name=""/>
-        <p:cNvGrpSpPr/>
-        <p:nvPr/>
-      </p:nvGrpSpPr>
-      <p:grpSpPr>
-        <a:xfrm>
-          <a:off x="0" y="0"/>
-          <a:ext cx="0" cy="0"/>
-          <a:chOff x="0" y="0"/>
-          <a:chExt cx="0" cy="0"/>
-        </a:xfrm>
-      </p:grpSpPr>
-      <p:sp>
-        <p:nvSpPr>
-          <p:cNvPr id="2" name="Shape 0"/>
-          <p:cNvSpPr/>
-          <p:nvPr/>
-        </p:nvSpPr>
-        <p:spPr>
-          <a:xfrm>
-            <a:off x="0" y="0"/>
-            <a:ext cx="9144000" cy="54864"/>
-          </a:xfrm>
-          <a:prstGeom prst="rect">
-            <a:avLst/>
-          </a:prstGeom>
-          <a:solidFill>
-            <a:srgbClr val="C8372D"/>
-          </a:solidFill>
-          <a:ln/>
-        </p:spPr>
-      </p:sp>
-      <p:sp>
-        <p:nvSpPr>
-          <p:cNvPr id="3" name="Text 1"/>
-          <p:cNvSpPr/>
-          <p:nvPr/>
-        </p:nvSpPr>
-        <p:spPr>
-          <a:xfrm>
-            <a:off x="457200" y="228600"/>
-            <a:ext cx="8229600" cy="548640"/>
-          </a:xfrm>
-          <a:prstGeom prst="rect">
-            <a:avLst/>
-          </a:prstGeom>
-          <a:noFill/>
-          <a:ln/>
-        </p:spPr>
-        <p:txBody>
-          <a:bodyPr wrap="square" lIns="0" tIns="0" rIns="0" bIns="0" rtlCol="0" anchor="ctr"/>
-          <a:lstStyle/>
-          <a:p>
-            <a:pPr indent="0" marL="0">
-              <a:buNone/>
-            </a:pPr>
-            <a:r>
-              <a:rPr lang="en-US" sz="2400" b="1" dirty="0">
-                <a:solidFill>
-                  <a:srgbClr val="1B2A4A"/>
-                </a:solidFill>
-                <a:latin typeface="Georgia" pitchFamily="34" charset="0"/>
-                <a:ea typeface="Georgia" pitchFamily="34" charset="-122"/>
-                <a:cs typeface="Georgia" pitchFamily="34" charset="-120"/>
-              </a:rPr>
-              <a:t>Check Your Understanding</a:t>
-            </a:r>
-            <a:endParaRPr lang="en-US" sz="2400" dirty="0"/>
-          </a:p>
-        </p:txBody>
-      </p:sp>
-      <p:sp>
-        <p:nvSpPr>
-          <p:cNvPr id="4" name="Shape 2"/>
-          <p:cNvSpPr/>
-          <p:nvPr/>
-        </p:nvSpPr>
-        <p:spPr>
-          <a:xfrm>
-            <a:off x="457200" y="868680"/>
-            <a:ext cx="1828800" cy="27432"/>
-          </a:xfrm>
-          <a:prstGeom prst="rect">
-            <a:avLst/>
-          </a:prstGeom>
-          <a:solidFill>
-            <a:srgbClr val="C8372D"/>
-          </a:solidFill>
-          <a:ln/>
-        </p:spPr>
-      </p:sp>
-      <p:sp>
-        <p:nvSpPr>
-          <p:cNvPr id="5" name="Shape 3"/>
-          <p:cNvSpPr/>
-          <p:nvPr/>
-        </p:nvSpPr>
-        <p:spPr>
-          <a:xfrm>
-            <a:off x="457200" y="1188720"/>
-            <a:ext cx="8229600" cy="1371600"/>
-          </a:xfrm>
-          <a:prstGeom prst="roundRect">
-            <a:avLst>
-              <a:gd name="adj" fmla="val 10000"/>
-            </a:avLst>
-          </a:prstGeom>
-          <a:solidFill>
-            <a:srgbClr val="FAF8F5"/>
-          </a:solidFill>
-          <a:ln w="12700">
-            <a:solidFill>
-              <a:srgbClr val="E5E2DC"/>
-            </a:solidFill>
-            <a:prstDash val="solid"/>
-          </a:ln>
-        </p:spPr>
-      </p:sp>
-      <p:sp>
-        <p:nvSpPr>
-          <p:cNvPr id="6" name="Text 4"/>
-          <p:cNvSpPr/>
-          <p:nvPr/>
-        </p:nvSpPr>
-        <p:spPr>
-          <a:xfrm>
-            <a:off x="731520" y="1188720"/>
-            <a:ext cx="7680960" cy="1371600"/>
-          </a:xfrm>
-          <a:prstGeom prst="rect">
-            <a:avLst/>
-          </a:prstGeom>
-          <a:noFill/>
-          <a:ln/>
-        </p:spPr>
-        <p:txBody>
-          <a:bodyPr wrap="square" rtlCol="0" anchor="ctr"/>
-          <a:lstStyle/>
-          <a:p>
-            <a:pPr indent="0" marL="0">
-              <a:buNone/>
-            </a:pPr>
-            <a:r>
-              <a:rPr lang="en-US" sz="1800" b="1" dirty="0">
-                <a:solidFill>
-                  <a:srgbClr val="1B2A4A"/>
-                </a:solidFill>
-                <a:latin typeface="Georgia" pitchFamily="34" charset="0"/>
-                <a:ea typeface="Georgia" pitchFamily="34" charset="-122"/>
-                <a:cs typeface="Georgia" pitchFamily="34" charset="-120"/>
-              </a:rPr>
-              <a:t>❓  Factorise: 10x + 15</a:t>
-            </a:r>
-            <a:endParaRPr lang="en-US" sz="1800" dirty="0"/>
-          </a:p>
-        </p:txBody>
-      </p:sp>
-      <p:sp>
-        <p:nvSpPr>
-          <p:cNvPr id="7" name="Shape 5"/>
-          <p:cNvSpPr/>
-          <p:nvPr/>
-        </p:nvSpPr>
-        <p:spPr>
-          <a:xfrm>
-            <a:off x="457200" y="2926080"/>
-            <a:ext cx="8229600" cy="1463040"/>
-          </a:xfrm>
-          <a:prstGeom prst="roundRect">
-            <a:avLst>
-              <a:gd name="adj" fmla="val 9375"/>
-            </a:avLst>
-          </a:prstGeom>
-          <a:solidFill>
-            <a:srgbClr val="E8F5F3"/>
-          </a:solidFill>
-          <a:ln/>
-        </p:spPr>
-      </p:sp>
-      <p:sp>
-        <p:nvSpPr>
-          <p:cNvPr id="8" name="Shape 6"/>
-          <p:cNvSpPr/>
-          <p:nvPr/>
-        </p:nvSpPr>
-        <p:spPr>
-          <a:xfrm>
-            <a:off x="457200" y="2926080"/>
-            <a:ext cx="54864" cy="1463040"/>
-          </a:xfrm>
-          <a:prstGeom prst="rect">
-            <a:avLst/>
-          </a:prstGeom>
-          <a:solidFill>
-            <a:srgbClr val="C8372D"/>
-          </a:solidFill>
-          <a:ln/>
-        </p:spPr>
-      </p:sp>
-      <p:sp>
-        <p:nvSpPr>
-          <p:cNvPr id="9" name="Text 7"/>
-          <p:cNvSpPr/>
-          <p:nvPr/>
-        </p:nvSpPr>
-        <p:spPr>
-          <a:xfrm>
-            <a:off x="731520" y="2926080"/>
-            <a:ext cx="7680960" cy="1463040"/>
-          </a:xfrm>
-          <a:prstGeom prst="rect">
-            <a:avLst/>
-          </a:prstGeom>
-          <a:noFill/>
-          <a:ln/>
-        </p:spPr>
-        <p:txBody>
-          <a:bodyPr wrap="square" rtlCol="0" anchor="ctr"/>
-          <a:lstStyle/>
-          <a:p>
-            <a:pPr indent="0" marL="0">
-              <a:lnSpc>
-                <a:spcPct val="140000"/>
-              </a:lnSpc>
-              <a:buNone/>
-            </a:pPr>
-            <a:r>
-              <a:rPr lang="en-US" sz="1600" dirty="0">
-                <a:solidFill>
-                  <a:srgbClr val="3D3A36"/>
-                </a:solidFill>
-                <a:latin typeface="Calibri" pitchFamily="34" charset="0"/>
-                <a:ea typeface="Calibri" pitchFamily="34" charset="-122"/>
-                <a:cs typeface="Calibri" pitchFamily="34" charset="-120"/>
-              </a:rPr>
-              <a:t>5(2x + 3) — HCF of 10 and 15 is 5.</a:t>
-            </a:r>
-            <a:endParaRPr lang="en-US" sz="1600" dirty="0"/>
-          </a:p>
-        </p:txBody>
-      </p:sp>
-      <p:sp>
-        <p:nvSpPr>
-          <p:cNvPr id="10" name="Text 8"/>
-          <p:cNvSpPr/>
-          <p:nvPr/>
-        </p:nvSpPr>
-        <p:spPr>
-          <a:xfrm>
-            <a:off x="7315200" y="4754880"/>
-            <a:ext cx="1828800" cy="274320"/>
-          </a:xfrm>
-          <a:prstGeom prst="rect">
-            <a:avLst/>
-          </a:prstGeom>
-          <a:noFill/>
-          <a:ln/>
-        </p:spPr>
-        <p:txBody>
-          <a:bodyPr wrap="square" rtlCol="0" anchor="ctr"/>
-          <a:lstStyle/>
-          <a:p>
-            <a:pPr algn="r" indent="0" marL="0">
-              <a:buNone/>
-            </a:pPr>
-            <a:r>
-              <a:rPr lang="en-US" sz="900" dirty="0">
-                <a:solidFill>
-                  <a:srgbClr val="9B9690"/>
-                </a:solidFill>
-                <a:latin typeface="Calibri" pitchFamily="34" charset="0"/>
-                <a:ea typeface="Calibri" pitchFamily="34" charset="-122"/>
-                <a:cs typeface="Calibri" pitchFamily="34" charset="-120"/>
-              </a:rPr>
-              <a:t>mrzocchi.com</a:t>
-            </a:r>
-            <a:endParaRPr lang="en-US" sz="900" dirty="0"/>
-          </a:p>
-        </p:txBody>
-      </p:sp>
-    </p:spTree>
-  </p:cSld>
-  <p:clrMapOvr>
-    <a:masterClrMapping/>
-  </p:clrMapOvr>
-</p:sld>
-</file>
-
-<file path=ppt/slides/slide12.xml><?xml version="1.0" encoding="utf-8"?>
-<p:sld xmlns:a="http://schemas.openxmlformats.org/drawingml/2006/main" xmlns:r="http://schemas.openxmlformats.org/officeDocument/2006/relationships" xmlns:p="http://schemas.openxmlformats.org/presentationml/2006/main">
-  <p:cSld name="Slide 12">
-    <p:spTree>
-      <p:nvGrpSpPr>
-        <p:cNvPr id="1" name=""/>
-        <p:cNvGrpSpPr/>
-        <p:nvPr/>
-      </p:nvGrpSpPr>
-      <p:grpSpPr>
-        <a:xfrm>
-          <a:off x="0" y="0"/>
-          <a:ext cx="0" cy="0"/>
-          <a:chOff x="0" y="0"/>
-          <a:chExt cx="0" cy="0"/>
-        </a:xfrm>
-      </p:grpSpPr>
-      <p:sp>
-        <p:nvSpPr>
-          <p:cNvPr id="2" name="Shape 0"/>
-          <p:cNvSpPr/>
-          <p:nvPr/>
-        </p:nvSpPr>
-        <p:spPr>
-          <a:xfrm>
-            <a:off x="0" y="0"/>
-            <a:ext cx="9144000" cy="54864"/>
-          </a:xfrm>
-          <a:prstGeom prst="rect">
-            <a:avLst/>
-          </a:prstGeom>
-          <a:solidFill>
-            <a:srgbClr val="C8372D"/>
-          </a:solidFill>
-          <a:ln/>
-        </p:spPr>
-      </p:sp>
-      <p:sp>
-        <p:nvSpPr>
-          <p:cNvPr id="3" name="Text 1"/>
-          <p:cNvSpPr/>
-          <p:nvPr/>
-        </p:nvSpPr>
-        <p:spPr>
-          <a:xfrm>
-            <a:off x="457200" y="228600"/>
-            <a:ext cx="8229600" cy="548640"/>
-          </a:xfrm>
-          <a:prstGeom prst="rect">
-            <a:avLst/>
-          </a:prstGeom>
-          <a:noFill/>
-          <a:ln/>
-        </p:spPr>
-        <p:txBody>
-          <a:bodyPr wrap="square" lIns="0" tIns="0" rIns="0" bIns="0" rtlCol="0" anchor="ctr"/>
-          <a:lstStyle/>
-          <a:p>
-            <a:pPr indent="0" marL="0">
-              <a:buNone/>
-            </a:pPr>
-            <a:r>
-              <a:rPr lang="en-US" sz="2400" b="1" dirty="0">
-                <a:solidFill>
-                  <a:srgbClr val="1B2A4A"/>
-                </a:solidFill>
-                <a:latin typeface="Georgia" pitchFamily="34" charset="0"/>
-                <a:ea typeface="Georgia" pitchFamily="34" charset="-122"/>
-                <a:cs typeface="Georgia" pitchFamily="34" charset="-120"/>
-              </a:rPr>
-              <a:t>Check Your Understanding</a:t>
-            </a:r>
-            <a:endParaRPr lang="en-US" sz="2400" dirty="0"/>
-          </a:p>
-        </p:txBody>
-      </p:sp>
-      <p:sp>
-        <p:nvSpPr>
-          <p:cNvPr id="4" name="Shape 2"/>
-          <p:cNvSpPr/>
-          <p:nvPr/>
-        </p:nvSpPr>
-        <p:spPr>
-          <a:xfrm>
-            <a:off x="457200" y="868680"/>
-            <a:ext cx="1828800" cy="27432"/>
-          </a:xfrm>
-          <a:prstGeom prst="rect">
-            <a:avLst/>
-          </a:prstGeom>
-          <a:solidFill>
-            <a:srgbClr val="C8372D"/>
-          </a:solidFill>
-          <a:ln/>
-        </p:spPr>
-      </p:sp>
-      <p:sp>
-        <p:nvSpPr>
-          <p:cNvPr id="5" name="Shape 3"/>
-          <p:cNvSpPr/>
-          <p:nvPr/>
-        </p:nvSpPr>
-        <p:spPr>
-          <a:xfrm>
-            <a:off x="457200" y="1188720"/>
-            <a:ext cx="8229600" cy="1371600"/>
-          </a:xfrm>
-          <a:prstGeom prst="roundRect">
-            <a:avLst>
-              <a:gd name="adj" fmla="val 10000"/>
-            </a:avLst>
-          </a:prstGeom>
-          <a:solidFill>
-            <a:srgbClr val="FAF8F5"/>
-          </a:solidFill>
-          <a:ln w="12700">
-            <a:solidFill>
-              <a:srgbClr val="E5E2DC"/>
-            </a:solidFill>
-            <a:prstDash val="solid"/>
-          </a:ln>
-        </p:spPr>
-      </p:sp>
-      <p:sp>
-        <p:nvSpPr>
-          <p:cNvPr id="6" name="Text 4"/>
-          <p:cNvSpPr/>
-          <p:nvPr/>
-        </p:nvSpPr>
-        <p:spPr>
-          <a:xfrm>
-            <a:off x="731520" y="1188720"/>
-            <a:ext cx="7680960" cy="1371600"/>
-          </a:xfrm>
-          <a:prstGeom prst="rect">
-            <a:avLst/>
-          </a:prstGeom>
-          <a:noFill/>
-          <a:ln/>
-        </p:spPr>
-        <p:txBody>
-          <a:bodyPr wrap="square" rtlCol="0" anchor="ctr"/>
-          <a:lstStyle/>
-          <a:p>
-            <a:pPr indent="0" marL="0">
-              <a:buNone/>
-            </a:pPr>
-            <a:r>
-              <a:rPr lang="en-US" sz="1800" b="1" dirty="0">
-                <a:solidFill>
-                  <a:srgbClr val="1B2A4A"/>
-                </a:solidFill>
-                <a:latin typeface="Georgia" pitchFamily="34" charset="0"/>
-                <a:ea typeface="Georgia" pitchFamily="34" charset="-122"/>
-                <a:cs typeface="Georgia" pitchFamily="34" charset="-120"/>
-              </a:rPr>
-              <a:t>❓  Solve: 5x − 3 = 2x + 12</a:t>
-            </a:r>
-            <a:endParaRPr lang="en-US" sz="1800" dirty="0"/>
-          </a:p>
-        </p:txBody>
-      </p:sp>
-      <p:sp>
-        <p:nvSpPr>
-          <p:cNvPr id="7" name="Shape 5"/>
-          <p:cNvSpPr/>
-          <p:nvPr/>
-        </p:nvSpPr>
-        <p:spPr>
-          <a:xfrm>
-            <a:off x="457200" y="2926080"/>
-            <a:ext cx="8229600" cy="1463040"/>
-          </a:xfrm>
-          <a:prstGeom prst="roundRect">
-            <a:avLst>
-              <a:gd name="adj" fmla="val 9375"/>
-            </a:avLst>
-          </a:prstGeom>
-          <a:solidFill>
-            <a:srgbClr val="E8F5F3"/>
-          </a:solidFill>
-          <a:ln/>
-        </p:spPr>
-      </p:sp>
-      <p:sp>
-        <p:nvSpPr>
-          <p:cNvPr id="8" name="Shape 6"/>
-          <p:cNvSpPr/>
-          <p:nvPr/>
-        </p:nvSpPr>
-        <p:spPr>
-          <a:xfrm>
-            <a:off x="457200" y="2926080"/>
-            <a:ext cx="54864" cy="1463040"/>
-          </a:xfrm>
-          <a:prstGeom prst="rect">
-            <a:avLst/>
-          </a:prstGeom>
-          <a:solidFill>
-            <a:srgbClr val="C8372D"/>
-          </a:solidFill>
-          <a:ln/>
-        </p:spPr>
-      </p:sp>
-      <p:sp>
-        <p:nvSpPr>
-          <p:cNvPr id="9" name="Text 7"/>
-          <p:cNvSpPr/>
-          <p:nvPr/>
-        </p:nvSpPr>
-        <p:spPr>
-          <a:xfrm>
-            <a:off x="731520" y="2926080"/>
-            <a:ext cx="7680960" cy="1463040"/>
-          </a:xfrm>
-          <a:prstGeom prst="rect">
-            <a:avLst/>
-          </a:prstGeom>
-          <a:noFill/>
-          <a:ln/>
-        </p:spPr>
-        <p:txBody>
-          <a:bodyPr wrap="square" rtlCol="0" anchor="ctr"/>
-          <a:lstStyle/>
-          <a:p>
-            <a:pPr indent="0" marL="0">
-              <a:lnSpc>
-                <a:spcPct val="140000"/>
-              </a:lnSpc>
-              <a:buNone/>
-            </a:pPr>
-            <a:r>
-              <a:rPr lang="en-US" sz="1600" dirty="0">
-                <a:solidFill>
-                  <a:srgbClr val="3D3A36"/>
-                </a:solidFill>
-                <a:latin typeface="Calibri" pitchFamily="34" charset="0"/>
-                <a:ea typeface="Calibri" pitchFamily="34" charset="-122"/>
-                <a:cs typeface="Calibri" pitchFamily="34" charset="-120"/>
-              </a:rPr>
-              <a:t>3x = 15, so x = 5. (Collect x terms, then divide.)</a:t>
-            </a:r>
-            <a:endParaRPr lang="en-US" sz="1600" dirty="0"/>
-          </a:p>
-        </p:txBody>
-      </p:sp>
-      <p:sp>
-        <p:nvSpPr>
-          <p:cNvPr id="10" name="Text 8"/>
-          <p:cNvSpPr/>
-          <p:nvPr/>
-        </p:nvSpPr>
-        <p:spPr>
-          <a:xfrm>
-            <a:off x="7315200" y="4754880"/>
-            <a:ext cx="1828800" cy="274320"/>
-          </a:xfrm>
-          <a:prstGeom prst="rect">
-            <a:avLst/>
-          </a:prstGeom>
-          <a:noFill/>
-          <a:ln/>
-        </p:spPr>
-        <p:txBody>
-          <a:bodyPr wrap="square" rtlCol="0" anchor="ctr"/>
-          <a:lstStyle/>
-          <a:p>
-            <a:pPr algn="r" indent="0" marL="0">
-              <a:buNone/>
-            </a:pPr>
-            <a:r>
-              <a:rPr lang="en-US" sz="900" dirty="0">
-                <a:solidFill>
-                  <a:srgbClr val="9B9690"/>
-                </a:solidFill>
-                <a:latin typeface="Calibri" pitchFamily="34" charset="0"/>
-                <a:ea typeface="Calibri" pitchFamily="34" charset="-122"/>
-                <a:cs typeface="Calibri" pitchFamily="34" charset="-120"/>
-              </a:rPr>
-              <a:t>mrzocchi.com</a:t>
-            </a:r>
-            <a:endParaRPr lang="en-US" sz="900" dirty="0"/>
-          </a:p>
-        </p:txBody>
-      </p:sp>
-    </p:spTree>
-  </p:cSld>
-  <p:clrMapOvr>
-    <a:masterClrMapping/>
-  </p:clrMapOvr>
-</p:sld>
-</file>
-
-<file path=ppt/slides/slide13.xml><?xml version="1.0" encoding="utf-8"?>
-<p:sld xmlns:a="http://schemas.openxmlformats.org/drawingml/2006/main" xmlns:r="http://schemas.openxmlformats.org/officeDocument/2006/relationships" xmlns:p="http://schemas.openxmlformats.org/presentationml/2006/main">
-  <p:cSld name="Slide 13">
-    <p:bg>
-      <p:bgPr>
-        <a:solidFill>
-          <a:srgbClr val="1B2A4A"/>
-        </a:solidFill>
-      </p:bgPr>
-    </p:bg>
-    <p:spTree>
-      <p:nvGrpSpPr>
-        <p:cNvPr id="1" name=""/>
-        <p:cNvGrpSpPr/>
-        <p:nvPr/>
-      </p:nvGrpSpPr>
-      <p:grpSpPr>
-        <a:xfrm>
-          <a:off x="0" y="0"/>
-          <a:ext cx="0" cy="0"/>
-          <a:chOff x="0" y="0"/>
-          <a:chExt cx="0" cy="0"/>
-        </a:xfrm>
-      </p:grpSpPr>
-      <p:sp>
-        <p:nvSpPr>
-          <p:cNvPr id="2" name="Shape 0"/>
-          <p:cNvSpPr/>
-          <p:nvPr/>
-        </p:nvSpPr>
-        <p:spPr>
-          <a:xfrm>
-            <a:off x="0" y="4389120"/>
-            <a:ext cx="9144000" cy="54864"/>
-          </a:xfrm>
-          <a:prstGeom prst="rect">
-            <a:avLst/>
-          </a:prstGeom>
-          <a:solidFill>
-            <a:srgbClr val="C8372D"/>
-          </a:solidFill>
-          <a:ln/>
-        </p:spPr>
-      </p:sp>
-      <p:sp>
-        <p:nvSpPr>
-          <p:cNvPr id="3" name="Text 1"/>
-          <p:cNvSpPr/>
-          <p:nvPr/>
-        </p:nvSpPr>
-        <p:spPr>
-          <a:xfrm>
-            <a:off x="457200" y="1371600"/>
-            <a:ext cx="8229600" cy="1371600"/>
+            <a:off x="731520" y="1371600"/>
+            <a:ext cx="7680960" cy="914400"/>
           </a:xfrm>
           <a:prstGeom prst="rect">
             <a:avLst/>
@@ -3066,7 +1980,7 @@
                 <a:ea typeface="Georgia" pitchFamily="34" charset="-122"/>
                 <a:cs typeface="Georgia" pitchFamily="34" charset="-120"/>
               </a:rPr>
-              <a:t>Keep Practising!</a:t>
+              <a:t>Review &amp; Practise</a:t>
             </a:r>
             <a:endParaRPr lang="en-US" sz="3600" dirty="0"/>
           </a:p>
@@ -3074,14 +1988,14 @@
       </p:sp>
       <p:sp>
         <p:nvSpPr>
-          <p:cNvPr id="4" name="Text 2"/>
+          <p:cNvPr id="5" name="Text 3"/>
           <p:cNvSpPr/>
           <p:nvPr/>
         </p:nvSpPr>
         <p:spPr>
           <a:xfrm>
-            <a:off x="457200" y="2743200"/>
-            <a:ext cx="8229600" cy="731520"/>
+            <a:off x="731520" y="2560320"/>
+            <a:ext cx="7680960" cy="548640"/>
           </a:xfrm>
           <a:prstGeom prst="rect">
             <a:avLst/>
@@ -3097,48 +2011,9 @@
               <a:buNone/>
             </a:pPr>
             <a:r>
-              <a:rPr lang="en-US" sz="1800" dirty="0">
+              <a:rPr lang="en-US" sz="2000" dirty="0">
                 <a:solidFill>
-                  <a:srgbClr val="E9C46A"/>
-                </a:solidFill>
-                <a:latin typeface="Calibri" pitchFamily="34" charset="0"/>
-                <a:ea typeface="Calibri" pitchFamily="34" charset="-122"/>
-                <a:cs typeface="Calibri" pitchFamily="34" charset="-120"/>
-              </a:rPr>
-              <a:t>Use the Self-Quiz on mrzocchi.com to test yourself</a:t>
-            </a:r>
-            <a:endParaRPr lang="en-US" sz="1800" dirty="0"/>
-          </a:p>
-        </p:txBody>
-      </p:sp>
-      <p:sp>
-        <p:nvSpPr>
-          <p:cNvPr id="5" name="Text 3"/>
-          <p:cNvSpPr/>
-          <p:nvPr/>
-        </p:nvSpPr>
-        <p:spPr>
-          <a:xfrm>
-            <a:off x="457200" y="3840480"/>
-            <a:ext cx="8229600" cy="457200"/>
-          </a:xfrm>
-          <a:prstGeom prst="rect">
-            <a:avLst/>
-          </a:prstGeom>
-          <a:noFill/>
-          <a:ln/>
-        </p:spPr>
-        <p:txBody>
-          <a:bodyPr wrap="square" rtlCol="0" anchor="ctr"/>
-          <a:lstStyle/>
-          <a:p>
-            <a:pPr algn="ctr" indent="0" marL="0">
-              <a:buNone/>
-            </a:pPr>
-            <a:r>
-              <a:rPr lang="en-US" sz="1400" dirty="0">
-                <a:solidFill>
-                  <a:srgbClr val="9B9690"/>
+                  <a:srgbClr val="C8372D"/>
                 </a:solidFill>
                 <a:latin typeface="Calibri" pitchFamily="34" charset="0"/>
                 <a:ea typeface="Calibri" pitchFamily="34" charset="-122"/>
@@ -3146,7 +2021,7 @@
               </a:rPr>
               <a:t>mrzocchi.com</a:t>
             </a:r>
-            <a:endParaRPr lang="en-US" sz="1400" dirty="0"/>
+            <a:endParaRPr lang="en-US" sz="2000" dirty="0"/>
           </a:p>
         </p:txBody>
       </p:sp>
@@ -3184,13 +2059,13 @@
         <p:spPr>
           <a:xfrm>
             <a:off x="0" y="0"/>
-            <a:ext cx="9144000" cy="54864"/>
+            <a:ext cx="9144000" cy="5143500"/>
           </a:xfrm>
           <a:prstGeom prst="rect">
             <a:avLst/>
           </a:prstGeom>
           <a:solidFill>
-            <a:srgbClr val="C8372D"/>
+            <a:srgbClr val="111D35"/>
           </a:solidFill>
           <a:ln/>
         </p:spPr>
@@ -3203,87 +2078,8 @@
         </p:nvSpPr>
         <p:spPr>
           <a:xfrm>
-            <a:off x="457200" y="228600"/>
-            <a:ext cx="8229600" cy="548640"/>
-          </a:xfrm>
-          <a:prstGeom prst="rect">
-            <a:avLst/>
-          </a:prstGeom>
-          <a:noFill/>
-          <a:ln/>
-        </p:spPr>
-        <p:txBody>
-          <a:bodyPr wrap="square" lIns="0" tIns="0" rIns="0" bIns="0" rtlCol="0" anchor="ctr"/>
-          <a:lstStyle/>
-          <a:p>
-            <a:pPr indent="0" marL="0">
-              <a:buNone/>
-            </a:pPr>
-            <a:r>
-              <a:rPr lang="en-US" sz="2400" b="1" dirty="0">
-                <a:solidFill>
-                  <a:srgbClr val="1B2A4A"/>
-                </a:solidFill>
-                <a:latin typeface="Georgia" pitchFamily="34" charset="0"/>
-                <a:ea typeface="Georgia" pitchFamily="34" charset="-122"/>
-                <a:cs typeface="Georgia" pitchFamily="34" charset="-120"/>
-              </a:rPr>
-              <a:t>What We're Learning</a:t>
-            </a:r>
-            <a:endParaRPr lang="en-US" sz="2400" dirty="0"/>
-          </a:p>
-        </p:txBody>
-      </p:sp>
-      <p:sp>
-        <p:nvSpPr>
-          <p:cNvPr id="4" name="Shape 2"/>
-          <p:cNvSpPr/>
-          <p:nvPr/>
-        </p:nvSpPr>
-        <p:spPr>
-          <a:xfrm>
-            <a:off x="457200" y="868680"/>
-            <a:ext cx="1828800" cy="27432"/>
-          </a:xfrm>
-          <a:prstGeom prst="rect">
-            <a:avLst/>
-          </a:prstGeom>
-          <a:solidFill>
-            <a:srgbClr val="C8372D"/>
-          </a:solidFill>
-          <a:ln/>
-        </p:spPr>
-      </p:sp>
-      <p:sp>
-        <p:nvSpPr>
-          <p:cNvPr id="5" name="Shape 3"/>
-          <p:cNvSpPr/>
-          <p:nvPr/>
-        </p:nvSpPr>
-        <p:spPr>
-          <a:xfrm>
-            <a:off x="457200" y="1188720"/>
-            <a:ext cx="320040" cy="320040"/>
-          </a:xfrm>
-          <a:prstGeom prst="ellipse">
-            <a:avLst/>
-          </a:prstGeom>
-          <a:solidFill>
-            <a:srgbClr val="C8372D"/>
-          </a:solidFill>
-          <a:ln/>
-        </p:spPr>
-      </p:sp>
-      <p:sp>
-        <p:nvSpPr>
-          <p:cNvPr id="6" name="Text 4"/>
-          <p:cNvSpPr/>
-          <p:nvPr/>
-        </p:nvSpPr>
-        <p:spPr>
-          <a:xfrm>
-            <a:off x="457200" y="1188720"/>
-            <a:ext cx="320040" cy="320040"/>
+            <a:off x="731520" y="914400"/>
+            <a:ext cx="1828800" cy="1097280"/>
           </a:xfrm>
           <a:prstGeom prst="rect">
             <a:avLst/>
@@ -3295,34 +2091,36 @@
           <a:bodyPr wrap="square" rtlCol="0" anchor="ctr"/>
           <a:lstStyle/>
           <a:p>
-            <a:pPr algn="ctr" indent="0" marL="0">
+            <a:pPr indent="0" marL="0">
               <a:buNone/>
             </a:pPr>
             <a:r>
-              <a:rPr lang="en-US" sz="1200" b="1" dirty="0">
+              <a:rPr lang="en-US" sz="7200" b="1" dirty="0">
                 <a:solidFill>
-                  <a:srgbClr val="FFFFFF"/>
+                  <a:srgbClr val="C8372D">
+                    <a:alpha val="70000"/>
+                  </a:srgbClr>
                 </a:solidFill>
-                <a:latin typeface="Calibri" pitchFamily="34" charset="0"/>
-                <a:ea typeface="Calibri" pitchFamily="34" charset="-122"/>
-                <a:cs typeface="Calibri" pitchFamily="34" charset="-120"/>
+                <a:latin typeface="Georgia" pitchFamily="34" charset="0"/>
+                <a:ea typeface="Georgia" pitchFamily="34" charset="-122"/>
+                <a:cs typeface="Georgia" pitchFamily="34" charset="-120"/>
               </a:rPr>
-              <a:t>1</a:t>
+              <a:t>01</a:t>
             </a:r>
-            <a:endParaRPr lang="en-US" sz="1200" dirty="0"/>
+            <a:endParaRPr lang="en-US" sz="7200" dirty="0"/>
           </a:p>
         </p:txBody>
       </p:sp>
       <p:sp>
         <p:nvSpPr>
-          <p:cNvPr id="7" name="Text 5"/>
+          <p:cNvPr id="4" name="Text 2"/>
           <p:cNvSpPr/>
           <p:nvPr/>
         </p:nvSpPr>
         <p:spPr>
           <a:xfrm>
-            <a:off x="914400" y="1143000"/>
-            <a:ext cx="7772400" cy="411480"/>
+            <a:off x="731520" y="2011680"/>
+            <a:ext cx="7680960" cy="1097280"/>
           </a:xfrm>
           <a:prstGeom prst="rect">
             <a:avLst/>
@@ -3338,32 +2136,32 @@
               <a:buNone/>
             </a:pPr>
             <a:r>
-              <a:rPr lang="en-US" sz="1600" dirty="0">
+              <a:rPr lang="en-US" sz="3200" b="1" dirty="0">
                 <a:solidFill>
-                  <a:srgbClr val="3D3A36"/>
+                  <a:srgbClr val="FFFFFF"/>
                 </a:solidFill>
-                <a:latin typeface="Calibri" pitchFamily="34" charset="0"/>
-                <a:ea typeface="Calibri" pitchFamily="34" charset="-122"/>
-                <a:cs typeface="Calibri" pitchFamily="34" charset="-120"/>
+                <a:latin typeface="Georgia" pitchFamily="34" charset="0"/>
+                <a:ea typeface="Georgia" pitchFamily="34" charset="-122"/>
+                <a:cs typeface="Georgia" pitchFamily="34" charset="-120"/>
               </a:rPr>
-              <a:t>We are extending algebraic skills to include expanding brackets, solving multi-step equations and inequalities, finding nth term rules, and plotting linear graphs.</a:t>
+              <a:t>Expressions</a:t>
             </a:r>
-            <a:endParaRPr lang="en-US" sz="1600" dirty="0"/>
+            <a:endParaRPr lang="en-US" sz="3200" dirty="0"/>
           </a:p>
         </p:txBody>
       </p:sp>
       <p:sp>
         <p:nvSpPr>
-          <p:cNvPr id="8" name="Shape 6"/>
+          <p:cNvPr id="5" name="Shape 3"/>
           <p:cNvSpPr/>
           <p:nvPr/>
         </p:nvSpPr>
         <p:spPr>
           <a:xfrm>
-            <a:off x="457200" y="1783080"/>
-            <a:ext cx="320040" cy="320040"/>
+            <a:off x="731520" y="3200400"/>
+            <a:ext cx="1828800" cy="54864"/>
           </a:xfrm>
-          <a:prstGeom prst="ellipse">
+          <a:prstGeom prst="rect">
             <a:avLst/>
           </a:prstGeom>
           <a:solidFill>
@@ -3371,319 +2169,6 @@
           </a:solidFill>
           <a:ln/>
         </p:spPr>
-      </p:sp>
-      <p:sp>
-        <p:nvSpPr>
-          <p:cNvPr id="9" name="Text 7"/>
-          <p:cNvSpPr/>
-          <p:nvPr/>
-        </p:nvSpPr>
-        <p:spPr>
-          <a:xfrm>
-            <a:off x="457200" y="1783080"/>
-            <a:ext cx="320040" cy="320040"/>
-          </a:xfrm>
-          <a:prstGeom prst="rect">
-            <a:avLst/>
-          </a:prstGeom>
-          <a:noFill/>
-          <a:ln/>
-        </p:spPr>
-        <p:txBody>
-          <a:bodyPr wrap="square" rtlCol="0" anchor="ctr"/>
-          <a:lstStyle/>
-          <a:p>
-            <a:pPr algn="ctr" indent="0" marL="0">
-              <a:buNone/>
-            </a:pPr>
-            <a:r>
-              <a:rPr lang="en-US" sz="1200" b="1" dirty="0">
-                <a:solidFill>
-                  <a:srgbClr val="FFFFFF"/>
-                </a:solidFill>
-                <a:latin typeface="Calibri" pitchFamily="34" charset="0"/>
-                <a:ea typeface="Calibri" pitchFamily="34" charset="-122"/>
-                <a:cs typeface="Calibri" pitchFamily="34" charset="-120"/>
-              </a:rPr>
-              <a:t>2</a:t>
-            </a:r>
-            <a:endParaRPr lang="en-US" sz="1200" dirty="0"/>
-          </a:p>
-        </p:txBody>
-      </p:sp>
-      <p:sp>
-        <p:nvSpPr>
-          <p:cNvPr id="10" name="Text 8"/>
-          <p:cNvSpPr/>
-          <p:nvPr/>
-        </p:nvSpPr>
-        <p:spPr>
-          <a:xfrm>
-            <a:off x="914400" y="1737360"/>
-            <a:ext cx="7772400" cy="411480"/>
-          </a:xfrm>
-          <a:prstGeom prst="rect">
-            <a:avLst/>
-          </a:prstGeom>
-          <a:noFill/>
-          <a:ln/>
-        </p:spPr>
-        <p:txBody>
-          <a:bodyPr wrap="square" rtlCol="0" anchor="ctr"/>
-          <a:lstStyle/>
-          <a:p>
-            <a:pPr indent="0" marL="0">
-              <a:buNone/>
-            </a:pPr>
-            <a:r>
-              <a:rPr lang="en-US" sz="1600" dirty="0">
-                <a:solidFill>
-                  <a:srgbClr val="3D3A36"/>
-                </a:solidFill>
-                <a:latin typeface="Calibri" pitchFamily="34" charset="0"/>
-                <a:ea typeface="Calibri" pitchFamily="34" charset="-122"/>
-                <a:cs typeface="Calibri" pitchFamily="34" charset="-120"/>
-              </a:rPr>
-              <a:t>Key Concept: Logic</a:t>
-            </a:r>
-            <a:endParaRPr lang="en-US" sz="1600" dirty="0"/>
-          </a:p>
-        </p:txBody>
-      </p:sp>
-      <p:sp>
-        <p:nvSpPr>
-          <p:cNvPr id="11" name="Shape 9"/>
-          <p:cNvSpPr/>
-          <p:nvPr/>
-        </p:nvSpPr>
-        <p:spPr>
-          <a:xfrm>
-            <a:off x="457200" y="2377440"/>
-            <a:ext cx="320040" cy="320040"/>
-          </a:xfrm>
-          <a:prstGeom prst="ellipse">
-            <a:avLst/>
-          </a:prstGeom>
-          <a:solidFill>
-            <a:srgbClr val="C8372D"/>
-          </a:solidFill>
-          <a:ln/>
-        </p:spPr>
-      </p:sp>
-      <p:sp>
-        <p:nvSpPr>
-          <p:cNvPr id="12" name="Text 10"/>
-          <p:cNvSpPr/>
-          <p:nvPr/>
-        </p:nvSpPr>
-        <p:spPr>
-          <a:xfrm>
-            <a:off x="457200" y="2377440"/>
-            <a:ext cx="320040" cy="320040"/>
-          </a:xfrm>
-          <a:prstGeom prst="rect">
-            <a:avLst/>
-          </a:prstGeom>
-          <a:noFill/>
-          <a:ln/>
-        </p:spPr>
-        <p:txBody>
-          <a:bodyPr wrap="square" rtlCol="0" anchor="ctr"/>
-          <a:lstStyle/>
-          <a:p>
-            <a:pPr algn="ctr" indent="0" marL="0">
-              <a:buNone/>
-            </a:pPr>
-            <a:r>
-              <a:rPr lang="en-US" sz="1200" b="1" dirty="0">
-                <a:solidFill>
-                  <a:srgbClr val="FFFFFF"/>
-                </a:solidFill>
-                <a:latin typeface="Calibri" pitchFamily="34" charset="0"/>
-                <a:ea typeface="Calibri" pitchFamily="34" charset="-122"/>
-                <a:cs typeface="Calibri" pitchFamily="34" charset="-120"/>
-              </a:rPr>
-              <a:t>3</a:t>
-            </a:r>
-            <a:endParaRPr lang="en-US" sz="1200" dirty="0"/>
-          </a:p>
-        </p:txBody>
-      </p:sp>
-      <p:sp>
-        <p:nvSpPr>
-          <p:cNvPr id="13" name="Text 11"/>
-          <p:cNvSpPr/>
-          <p:nvPr/>
-        </p:nvSpPr>
-        <p:spPr>
-          <a:xfrm>
-            <a:off x="914400" y="2331720"/>
-            <a:ext cx="7772400" cy="411480"/>
-          </a:xfrm>
-          <a:prstGeom prst="rect">
-            <a:avLst/>
-          </a:prstGeom>
-          <a:noFill/>
-          <a:ln/>
-        </p:spPr>
-        <p:txBody>
-          <a:bodyPr wrap="square" rtlCol="0" anchor="ctr"/>
-          <a:lstStyle/>
-          <a:p>
-            <a:pPr indent="0" marL="0">
-              <a:buNone/>
-            </a:pPr>
-            <a:r>
-              <a:rPr lang="en-US" sz="1600" dirty="0">
-                <a:solidFill>
-                  <a:srgbClr val="3D3A36"/>
-                </a:solidFill>
-                <a:latin typeface="Calibri" pitchFamily="34" charset="0"/>
-                <a:ea typeface="Calibri" pitchFamily="34" charset="-122"/>
-                <a:cs typeface="Calibri" pitchFamily="34" charset="-120"/>
-              </a:rPr>
-              <a:t>Global Context: Identities and Relationships</a:t>
-            </a:r>
-            <a:endParaRPr lang="en-US" sz="1600" dirty="0"/>
-          </a:p>
-        </p:txBody>
-      </p:sp>
-      <p:sp>
-        <p:nvSpPr>
-          <p:cNvPr id="14" name="Shape 12"/>
-          <p:cNvSpPr/>
-          <p:nvPr/>
-        </p:nvSpPr>
-        <p:spPr>
-          <a:xfrm>
-            <a:off x="457200" y="2971800"/>
-            <a:ext cx="320040" cy="320040"/>
-          </a:xfrm>
-          <a:prstGeom prst="ellipse">
-            <a:avLst/>
-          </a:prstGeom>
-          <a:solidFill>
-            <a:srgbClr val="E5E2DC"/>
-          </a:solidFill>
-          <a:ln/>
-        </p:spPr>
-      </p:sp>
-      <p:sp>
-        <p:nvSpPr>
-          <p:cNvPr id="15" name="Text 13"/>
-          <p:cNvSpPr/>
-          <p:nvPr/>
-        </p:nvSpPr>
-        <p:spPr>
-          <a:xfrm>
-            <a:off x="457200" y="2971800"/>
-            <a:ext cx="320040" cy="320040"/>
-          </a:xfrm>
-          <a:prstGeom prst="rect">
-            <a:avLst/>
-          </a:prstGeom>
-          <a:noFill/>
-          <a:ln/>
-        </p:spPr>
-        <p:txBody>
-          <a:bodyPr wrap="square" rtlCol="0" anchor="ctr"/>
-          <a:lstStyle/>
-          <a:p>
-            <a:pPr algn="ctr" indent="0" marL="0">
-              <a:buNone/>
-            </a:pPr>
-            <a:r>
-              <a:rPr lang="en-US" sz="1200" b="1" dirty="0">
-                <a:solidFill>
-                  <a:srgbClr val="FFFFFF"/>
-                </a:solidFill>
-                <a:latin typeface="Calibri" pitchFamily="34" charset="0"/>
-                <a:ea typeface="Calibri" pitchFamily="34" charset="-122"/>
-                <a:cs typeface="Calibri" pitchFamily="34" charset="-120"/>
-              </a:rPr>
-              <a:t>4</a:t>
-            </a:r>
-            <a:endParaRPr lang="en-US" sz="1200" dirty="0"/>
-          </a:p>
-        </p:txBody>
-      </p:sp>
-      <p:sp>
-        <p:nvSpPr>
-          <p:cNvPr id="16" name="Text 14"/>
-          <p:cNvSpPr/>
-          <p:nvPr/>
-        </p:nvSpPr>
-        <p:spPr>
-          <a:xfrm>
-            <a:off x="914400" y="2926080"/>
-            <a:ext cx="7772400" cy="411480"/>
-          </a:xfrm>
-          <a:prstGeom prst="rect">
-            <a:avLst/>
-          </a:prstGeom>
-          <a:noFill/>
-          <a:ln/>
-        </p:spPr>
-        <p:txBody>
-          <a:bodyPr wrap="square" rtlCol="0" anchor="ctr"/>
-          <a:lstStyle/>
-          <a:p>
-            <a:pPr indent="0" marL="0">
-              <a:buNone/>
-            </a:pPr>
-            <a:r>
-              <a:rPr lang="en-US" sz="1600" dirty="0">
-                <a:solidFill>
-                  <a:srgbClr val="3D3A36"/>
-                </a:solidFill>
-                <a:latin typeface="Calibri" pitchFamily="34" charset="0"/>
-                <a:ea typeface="Calibri" pitchFamily="34" charset="-122"/>
-                <a:cs typeface="Calibri" pitchFamily="34" charset="-120"/>
-              </a:rPr>
-              <a:t>"Logic allows us to generalise relationships, predict outcomes, and represent them graphically."</a:t>
-            </a:r>
-            <a:endParaRPr lang="en-US" sz="1600" dirty="0"/>
-          </a:p>
-        </p:txBody>
-      </p:sp>
-      <p:sp>
-        <p:nvSpPr>
-          <p:cNvPr id="17" name="Text 15"/>
-          <p:cNvSpPr/>
-          <p:nvPr/>
-        </p:nvSpPr>
-        <p:spPr>
-          <a:xfrm>
-            <a:off x="7315200" y="4754880"/>
-            <a:ext cx="1828800" cy="274320"/>
-          </a:xfrm>
-          <a:prstGeom prst="rect">
-            <a:avLst/>
-          </a:prstGeom>
-          <a:noFill/>
-          <a:ln/>
-        </p:spPr>
-        <p:txBody>
-          <a:bodyPr wrap="square" rtlCol="0" anchor="ctr"/>
-          <a:lstStyle/>
-          <a:p>
-            <a:pPr algn="r" indent="0" marL="0">
-              <a:buNone/>
-            </a:pPr>
-            <a:r>
-              <a:rPr lang="en-US" sz="900" dirty="0">
-                <a:solidFill>
-                  <a:srgbClr val="9B9690"/>
-                </a:solidFill>
-                <a:latin typeface="Calibri" pitchFamily="34" charset="0"/>
-                <a:ea typeface="Calibri" pitchFamily="34" charset="-122"/>
-                <a:cs typeface="Calibri" pitchFamily="34" charset="-120"/>
-              </a:rPr>
-              <a:t>mrzocchi.com</a:t>
-            </a:r>
-            <a:endParaRPr lang="en-US" sz="900" dirty="0"/>
-          </a:p>
-        </p:txBody>
       </p:sp>
     </p:spTree>
   </p:cSld>
@@ -3696,6 +2181,13 @@
 <file path=ppt/slides/slide3.xml><?xml version="1.0" encoding="utf-8"?>
 <p:sld xmlns:a="http://schemas.openxmlformats.org/drawingml/2006/main" xmlns:r="http://schemas.openxmlformats.org/officeDocument/2006/relationships" xmlns:p="http://schemas.openxmlformats.org/presentationml/2006/main">
   <p:cSld name="Slide 3">
+    <p:bg>
+      <p:bgPr>
+        <a:solidFill>
+          <a:srgbClr val="FAF8F5"/>
+        </a:solidFill>
+      </p:bgPr>
+    </p:bg>
     <p:spTree>
       <p:nvGrpSpPr>
         <p:cNvPr id="1" name=""/>
@@ -3719,7 +2211,27 @@
         <p:spPr>
           <a:xfrm>
             <a:off x="0" y="0"/>
-            <a:ext cx="9144000" cy="54864"/>
+            <a:ext cx="9144000" cy="822960"/>
+          </a:xfrm>
+          <a:prstGeom prst="rect">
+            <a:avLst/>
+          </a:prstGeom>
+          <a:solidFill>
+            <a:srgbClr val="FFFFFF"/>
+          </a:solidFill>
+          <a:ln/>
+        </p:spPr>
+      </p:sp>
+      <p:sp>
+        <p:nvSpPr>
+          <p:cNvPr id="3" name="Shape 1"/>
+          <p:cNvSpPr/>
+          <p:nvPr/>
+        </p:nvSpPr>
+        <p:spPr>
+          <a:xfrm>
+            <a:off x="0" y="795528"/>
+            <a:ext cx="9144000" cy="27432"/>
           </a:xfrm>
           <a:prstGeom prst="rect">
             <a:avLst/>
@@ -3732,14 +2244,14 @@
       </p:sp>
       <p:sp>
         <p:nvSpPr>
-          <p:cNvPr id="3" name="Text 1"/>
+          <p:cNvPr id="4" name="Text 2"/>
           <p:cNvSpPr/>
           <p:nvPr/>
         </p:nvSpPr>
         <p:spPr>
           <a:xfrm>
-            <a:off x="457200" y="228600"/>
-            <a:ext cx="8229600" cy="548640"/>
+            <a:off x="640080" y="91440"/>
+            <a:ext cx="7863840" cy="640080"/>
           </a:xfrm>
           <a:prstGeom prst="rect">
             <a:avLst/>
@@ -3755,7 +2267,7 @@
               <a:buNone/>
             </a:pPr>
             <a:r>
-              <a:rPr lang="en-US" sz="2400" b="1" dirty="0">
+              <a:rPr lang="en-US" sz="2200" b="1" dirty="0">
                 <a:solidFill>
                   <a:srgbClr val="1B2A4A"/>
                 </a:solidFill>
@@ -3763,31 +2275,11 @@
                 <a:ea typeface="Georgia" pitchFamily="34" charset="-122"/>
                 <a:cs typeface="Georgia" pitchFamily="34" charset="-120"/>
               </a:rPr>
-              <a:t>Key Vocabulary</a:t>
+              <a:t>Expressions Recap</a:t>
             </a:r>
-            <a:endParaRPr lang="en-US" sz="2400" dirty="0"/>
+            <a:endParaRPr lang="en-US" sz="2200" dirty="0"/>
           </a:p>
         </p:txBody>
-      </p:sp>
-      <p:sp>
-        <p:nvSpPr>
-          <p:cNvPr id="4" name="Shape 2"/>
-          <p:cNvSpPr/>
-          <p:nvPr/>
-        </p:nvSpPr>
-        <p:spPr>
-          <a:xfrm>
-            <a:off x="457200" y="868680"/>
-            <a:ext cx="1828800" cy="27432"/>
-          </a:xfrm>
-          <a:prstGeom prst="rect">
-            <a:avLst/>
-          </a:prstGeom>
-          <a:solidFill>
-            <a:srgbClr val="C8372D"/>
-          </a:solidFill>
-          <a:ln/>
-        </p:spPr>
       </p:sp>
       <p:sp>
         <p:nvSpPr>
@@ -3797,8 +2289,8 @@
         </p:nvSpPr>
         <p:spPr>
           <a:xfrm>
-            <a:off x="457200" y="1188720"/>
-            <a:ext cx="8229600" cy="548640"/>
+            <a:off x="640080" y="1005840"/>
+            <a:ext cx="7863840" cy="2926080"/>
           </a:xfrm>
           <a:prstGeom prst="rect">
             <a:avLst/>
@@ -3810,141 +2302,109 @@
           <a:bodyPr wrap="square" rtlCol="0" anchor="ctr"/>
           <a:lstStyle/>
           <a:p>
-            <a:pPr indent="0" marL="0">
-              <a:buNone/>
+            <a:pPr marL="342900" indent="-342900">
+              <a:spcAft>
+                <a:spcPts val="800"/>
+              </a:spcAft>
+              <a:buSzPct val="100000"/>
+              <a:buChar char="•"/>
             </a:pPr>
             <a:r>
-              <a:rPr lang="en-US" sz="2800" b="1" dirty="0">
+              <a:rPr lang="en-US" sz="1600" dirty="0">
                 <a:solidFill>
-                  <a:srgbClr val="C8372D"/>
-                </a:solidFill>
-                <a:latin typeface="Georgia" pitchFamily="34" charset="0"/>
-                <a:ea typeface="Georgia" pitchFamily="34" charset="-122"/>
-                <a:cs typeface="Georgia" pitchFamily="34" charset="-120"/>
-              </a:rPr>
-              <a:t>Expression</a:t>
-            </a:r>
-            <a:endParaRPr lang="en-US" sz="2800" dirty="0"/>
-          </a:p>
-        </p:txBody>
-      </p:sp>
-      <p:sp>
-        <p:nvSpPr>
-          <p:cNvPr id="6" name="Text 4"/>
-          <p:cNvSpPr/>
-          <p:nvPr/>
-        </p:nvSpPr>
-        <p:spPr>
-          <a:xfrm>
-            <a:off x="457200" y="1691640"/>
-            <a:ext cx="8229600" cy="365760"/>
-          </a:xfrm>
-          <a:prstGeom prst="rect">
-            <a:avLst/>
-          </a:prstGeom>
-          <a:noFill/>
-          <a:ln/>
-        </p:spPr>
-        <p:txBody>
-          <a:bodyPr wrap="square" rtlCol="0" anchor="ctr"/>
-          <a:lstStyle/>
-          <a:p>
-            <a:pPr indent="0" marL="0">
-              <a:buNone/>
-            </a:pPr>
-            <a:r>
-              <a:rPr lang="en-US" sz="1600" i="1" dirty="0">
-                <a:solidFill>
-                  <a:srgbClr val="9B9690"/>
+                  <a:srgbClr val="3D3A36"/>
                 </a:solidFill>
                 <a:latin typeface="Calibri" pitchFamily="34" charset="0"/>
                 <a:ea typeface="Calibri" pitchFamily="34" charset="-122"/>
                 <a:cs typeface="Calibri" pitchFamily="34" charset="-120"/>
               </a:rPr>
-              <a:t>代数式</a:t>
+              <a:t>Expand: multiply everything inside bracket by term outside.</a:t>
             </a:r>
             <a:endParaRPr lang="en-US" sz="1600" dirty="0"/>
           </a:p>
-        </p:txBody>
-      </p:sp>
-      <p:sp>
-        <p:nvSpPr>
-          <p:cNvPr id="7" name="Text 5"/>
-          <p:cNvSpPr/>
-          <p:nvPr/>
-        </p:nvSpPr>
-        <p:spPr>
-          <a:xfrm>
-            <a:off x="457200" y="2194560"/>
-            <a:ext cx="8229600" cy="1828800"/>
-          </a:xfrm>
-          <a:prstGeom prst="rect">
-            <a:avLst/>
-          </a:prstGeom>
-          <a:noFill/>
-          <a:ln/>
-        </p:spPr>
-        <p:txBody>
-          <a:bodyPr wrap="square" rtlCol="0" anchor="ctr"/>
-          <a:lstStyle/>
-          <a:p>
-            <a:pPr indent="0" marL="0">
-              <a:lnSpc>
-                <a:spcPct val="150000"/>
-              </a:lnSpc>
-              <a:buNone/>
+          <a:p>
+            <a:pPr marL="342900" indent="-342900">
+              <a:spcAft>
+                <a:spcPts val="800"/>
+              </a:spcAft>
+              <a:buSzPct val="100000"/>
+              <a:buChar char="•"/>
             </a:pPr>
             <a:r>
-              <a:rPr lang="en-US" sz="1800" dirty="0">
+              <a:rPr lang="en-US" sz="1600" dirty="0">
                 <a:solidFill>
-                  <a:srgbClr val="6B6660"/>
+                  <a:srgbClr val="3D3A36"/>
                 </a:solidFill>
                 <a:latin typeface="Calibri" pitchFamily="34" charset="0"/>
                 <a:ea typeface="Calibri" pitchFamily="34" charset="-122"/>
                 <a:cs typeface="Calibri" pitchFamily="34" charset="-120"/>
               </a:rPr>
-              <a:t>Numbers, variables, and operations combined. No equals sign. e.g. 3x + 5.</a:t>
+              <a:t>3(x + 4) = 3x + 12. Don't forget the second term!</a:t>
             </a:r>
-            <a:endParaRPr lang="en-US" sz="1800" dirty="0"/>
-          </a:p>
-        </p:txBody>
-      </p:sp>
-      <p:sp>
-        <p:nvSpPr>
-          <p:cNvPr id="8" name="Text 6"/>
-          <p:cNvSpPr/>
-          <p:nvPr/>
-        </p:nvSpPr>
-        <p:spPr>
-          <a:xfrm>
-            <a:off x="7315200" y="4754880"/>
-            <a:ext cx="1828800" cy="274320"/>
-          </a:xfrm>
-          <a:prstGeom prst="rect">
-            <a:avLst/>
-          </a:prstGeom>
-          <a:noFill/>
-          <a:ln/>
-        </p:spPr>
-        <p:txBody>
-          <a:bodyPr wrap="square" rtlCol="0" anchor="ctr"/>
-          <a:lstStyle/>
-          <a:p>
-            <a:pPr algn="r" indent="0" marL="0">
-              <a:buNone/>
+            <a:endParaRPr lang="en-US" sz="1600" dirty="0"/>
+          </a:p>
+          <a:p>
+            <a:pPr marL="342900" indent="-342900">
+              <a:spcAft>
+                <a:spcPts val="800"/>
+              </a:spcAft>
+              <a:buSzPct val="100000"/>
+              <a:buChar char="•"/>
             </a:pPr>
             <a:r>
-              <a:rPr lang="en-US" sz="900" dirty="0">
+              <a:rPr lang="en-US" sz="1600" dirty="0">
                 <a:solidFill>
-                  <a:srgbClr val="9B9690"/>
+                  <a:srgbClr val="3D3A36"/>
                 </a:solidFill>
                 <a:latin typeface="Calibri" pitchFamily="34" charset="0"/>
                 <a:ea typeface="Calibri" pitchFamily="34" charset="-122"/>
                 <a:cs typeface="Calibri" pitchFamily="34" charset="-120"/>
               </a:rPr>
-              <a:t>mrzocchi.com</a:t>
+              <a:t>Expand &amp; simplify: expand each bracket, then collect like terms.</a:t>
             </a:r>
-            <a:endParaRPr lang="en-US" sz="900" dirty="0"/>
+            <a:endParaRPr lang="en-US" sz="1600" dirty="0"/>
+          </a:p>
+          <a:p>
+            <a:pPr marL="342900" indent="-342900">
+              <a:spcAft>
+                <a:spcPts val="800"/>
+              </a:spcAft>
+              <a:buSzPct val="100000"/>
+              <a:buChar char="•"/>
+            </a:pPr>
+            <a:r>
+              <a:rPr lang="en-US" sz="1600" dirty="0">
+                <a:solidFill>
+                  <a:srgbClr val="3D3A36"/>
+                </a:solidFill>
+                <a:latin typeface="Calibri" pitchFamily="34" charset="0"/>
+                <a:ea typeface="Calibri" pitchFamily="34" charset="-122"/>
+                <a:cs typeface="Calibri" pitchFamily="34" charset="-120"/>
+              </a:rPr>
+              <a:t>Factorise: find HCF, take it outside. 6x + 12 = 6(x + 2).</a:t>
+            </a:r>
+            <a:endParaRPr lang="en-US" sz="1600" dirty="0"/>
+          </a:p>
+          <a:p>
+            <a:pPr marL="342900" indent="-342900">
+              <a:spcAft>
+                <a:spcPts val="800"/>
+              </a:spcAft>
+              <a:buSzPct val="100000"/>
+              <a:buChar char="•"/>
+            </a:pPr>
+            <a:r>
+              <a:rPr lang="en-US" sz="1600" dirty="0">
+                <a:solidFill>
+                  <a:srgbClr val="3D3A36"/>
+                </a:solidFill>
+                <a:latin typeface="Calibri" pitchFamily="34" charset="0"/>
+                <a:ea typeface="Calibri" pitchFamily="34" charset="-122"/>
+                <a:cs typeface="Calibri" pitchFamily="34" charset="-120"/>
+              </a:rPr>
+              <a:t>Check factorising by expanding back.</a:t>
+            </a:r>
+            <a:endParaRPr lang="en-US" sz="1600" dirty="0"/>
           </a:p>
         </p:txBody>
       </p:sp>
@@ -3982,13 +2442,13 @@
         <p:spPr>
           <a:xfrm>
             <a:off x="0" y="0"/>
-            <a:ext cx="9144000" cy="54864"/>
+            <a:ext cx="9144000" cy="5143500"/>
           </a:xfrm>
           <a:prstGeom prst="rect">
             <a:avLst/>
           </a:prstGeom>
           <a:solidFill>
-            <a:srgbClr val="C8372D"/>
+            <a:srgbClr val="111D35"/>
           </a:solidFill>
           <a:ln/>
         </p:spPr>
@@ -4001,67 +2461,8 @@
         </p:nvSpPr>
         <p:spPr>
           <a:xfrm>
-            <a:off x="457200" y="228600"/>
-            <a:ext cx="8229600" cy="548640"/>
-          </a:xfrm>
-          <a:prstGeom prst="rect">
-            <a:avLst/>
-          </a:prstGeom>
-          <a:noFill/>
-          <a:ln/>
-        </p:spPr>
-        <p:txBody>
-          <a:bodyPr wrap="square" lIns="0" tIns="0" rIns="0" bIns="0" rtlCol="0" anchor="ctr"/>
-          <a:lstStyle/>
-          <a:p>
-            <a:pPr indent="0" marL="0">
-              <a:buNone/>
-            </a:pPr>
-            <a:r>
-              <a:rPr lang="en-US" sz="2400" b="1" dirty="0">
-                <a:solidFill>
-                  <a:srgbClr val="1B2A4A"/>
-                </a:solidFill>
-                <a:latin typeface="Georgia" pitchFamily="34" charset="0"/>
-                <a:ea typeface="Georgia" pitchFamily="34" charset="-122"/>
-                <a:cs typeface="Georgia" pitchFamily="34" charset="-120"/>
-              </a:rPr>
-              <a:t>Key Vocabulary</a:t>
-            </a:r>
-            <a:endParaRPr lang="en-US" sz="2400" dirty="0"/>
-          </a:p>
-        </p:txBody>
-      </p:sp>
-      <p:sp>
-        <p:nvSpPr>
-          <p:cNvPr id="4" name="Shape 2"/>
-          <p:cNvSpPr/>
-          <p:nvPr/>
-        </p:nvSpPr>
-        <p:spPr>
-          <a:xfrm>
-            <a:off x="457200" y="868680"/>
-            <a:ext cx="1828800" cy="27432"/>
-          </a:xfrm>
-          <a:prstGeom prst="rect">
-            <a:avLst/>
-          </a:prstGeom>
-          <a:solidFill>
-            <a:srgbClr val="C8372D"/>
-          </a:solidFill>
-          <a:ln/>
-        </p:spPr>
-      </p:sp>
-      <p:sp>
-        <p:nvSpPr>
-          <p:cNvPr id="5" name="Text 3"/>
-          <p:cNvSpPr/>
-          <p:nvPr/>
-        </p:nvSpPr>
-        <p:spPr>
-          <a:xfrm>
-            <a:off x="457200" y="1188720"/>
-            <a:ext cx="8229600" cy="548640"/>
+            <a:off x="731520" y="914400"/>
+            <a:ext cx="1828800" cy="1097280"/>
           </a:xfrm>
           <a:prstGeom prst="rect">
             <a:avLst/>
@@ -4077,30 +2478,32 @@
               <a:buNone/>
             </a:pPr>
             <a:r>
-              <a:rPr lang="en-US" sz="2800" b="1" dirty="0">
+              <a:rPr lang="en-US" sz="7200" b="1" dirty="0">
                 <a:solidFill>
-                  <a:srgbClr val="C8372D"/>
+                  <a:srgbClr val="C8372D">
+                    <a:alpha val="70000"/>
+                  </a:srgbClr>
                 </a:solidFill>
                 <a:latin typeface="Georgia" pitchFamily="34" charset="0"/>
                 <a:ea typeface="Georgia" pitchFamily="34" charset="-122"/>
                 <a:cs typeface="Georgia" pitchFamily="34" charset="-120"/>
               </a:rPr>
-              <a:t>Equation</a:t>
+              <a:t>02</a:t>
             </a:r>
-            <a:endParaRPr lang="en-US" sz="2800" dirty="0"/>
+            <a:endParaRPr lang="en-US" sz="7200" dirty="0"/>
           </a:p>
         </p:txBody>
       </p:sp>
       <p:sp>
         <p:nvSpPr>
-          <p:cNvPr id="6" name="Text 4"/>
+          <p:cNvPr id="4" name="Text 2"/>
           <p:cNvSpPr/>
           <p:nvPr/>
         </p:nvSpPr>
         <p:spPr>
           <a:xfrm>
-            <a:off x="457200" y="1691640"/>
-            <a:ext cx="8229600" cy="365760"/>
+            <a:off x="731520" y="2011680"/>
+            <a:ext cx="7680960" cy="1097280"/>
           </a:xfrm>
           <a:prstGeom prst="rect">
             <a:avLst/>
@@ -4116,100 +2519,39 @@
               <a:buNone/>
             </a:pPr>
             <a:r>
-              <a:rPr lang="en-US" sz="1600" i="1" dirty="0">
+              <a:rPr lang="en-US" sz="3200" b="1" dirty="0">
                 <a:solidFill>
-                  <a:srgbClr val="9B9690"/>
+                  <a:srgbClr val="FFFFFF"/>
                 </a:solidFill>
-                <a:latin typeface="Calibri" pitchFamily="34" charset="0"/>
-                <a:ea typeface="Calibri" pitchFamily="34" charset="-122"/>
-                <a:cs typeface="Calibri" pitchFamily="34" charset="-120"/>
+                <a:latin typeface="Georgia" pitchFamily="34" charset="0"/>
+                <a:ea typeface="Georgia" pitchFamily="34" charset="-122"/>
+                <a:cs typeface="Georgia" pitchFamily="34" charset="-120"/>
               </a:rPr>
-              <a:t>方程</a:t>
+              <a:t>Equations</a:t>
             </a:r>
-            <a:endParaRPr lang="en-US" sz="1600" dirty="0"/>
+            <a:endParaRPr lang="en-US" sz="3200" dirty="0"/>
           </a:p>
         </p:txBody>
       </p:sp>
       <p:sp>
         <p:nvSpPr>
-          <p:cNvPr id="7" name="Text 5"/>
+          <p:cNvPr id="5" name="Shape 3"/>
           <p:cNvSpPr/>
           <p:nvPr/>
         </p:nvSpPr>
         <p:spPr>
           <a:xfrm>
-            <a:off x="457200" y="2194560"/>
-            <a:ext cx="8229600" cy="1828800"/>
+            <a:off x="731520" y="3200400"/>
+            <a:ext cx="1828800" cy="54864"/>
           </a:xfrm>
           <a:prstGeom prst="rect">
             <a:avLst/>
           </a:prstGeom>
-          <a:noFill/>
+          <a:solidFill>
+            <a:srgbClr val="C8372D"/>
+          </a:solidFill>
           <a:ln/>
         </p:spPr>
-        <p:txBody>
-          <a:bodyPr wrap="square" rtlCol="0" anchor="ctr"/>
-          <a:lstStyle/>
-          <a:p>
-            <a:pPr indent="0" marL="0">
-              <a:lnSpc>
-                <a:spcPct val="150000"/>
-              </a:lnSpc>
-              <a:buNone/>
-            </a:pPr>
-            <a:r>
-              <a:rPr lang="en-US" sz="1800" dirty="0">
-                <a:solidFill>
-                  <a:srgbClr val="6B6660"/>
-                </a:solidFill>
-                <a:latin typeface="Calibri" pitchFamily="34" charset="0"/>
-                <a:ea typeface="Calibri" pitchFamily="34" charset="-122"/>
-                <a:cs typeface="Calibri" pitchFamily="34" charset="-120"/>
-              </a:rPr>
-              <a:t>A mathematical statement with an equals sign. e.g. 3x + 5 = 20.</a:t>
-            </a:r>
-            <a:endParaRPr lang="en-US" sz="1800" dirty="0"/>
-          </a:p>
-        </p:txBody>
-      </p:sp>
-      <p:sp>
-        <p:nvSpPr>
-          <p:cNvPr id="8" name="Text 6"/>
-          <p:cNvSpPr/>
-          <p:nvPr/>
-        </p:nvSpPr>
-        <p:spPr>
-          <a:xfrm>
-            <a:off x="7315200" y="4754880"/>
-            <a:ext cx="1828800" cy="274320"/>
-          </a:xfrm>
-          <a:prstGeom prst="rect">
-            <a:avLst/>
-          </a:prstGeom>
-          <a:noFill/>
-          <a:ln/>
-        </p:spPr>
-        <p:txBody>
-          <a:bodyPr wrap="square" rtlCol="0" anchor="ctr"/>
-          <a:lstStyle/>
-          <a:p>
-            <a:pPr algn="r" indent="0" marL="0">
-              <a:buNone/>
-            </a:pPr>
-            <a:r>
-              <a:rPr lang="en-US" sz="900" dirty="0">
-                <a:solidFill>
-                  <a:srgbClr val="9B9690"/>
-                </a:solidFill>
-                <a:latin typeface="Calibri" pitchFamily="34" charset="0"/>
-                <a:ea typeface="Calibri" pitchFamily="34" charset="-122"/>
-                <a:cs typeface="Calibri" pitchFamily="34" charset="-120"/>
-              </a:rPr>
-              <a:t>mrzocchi.com</a:t>
-            </a:r>
-            <a:endParaRPr lang="en-US" sz="900" dirty="0"/>
-          </a:p>
-        </p:txBody>
       </p:sp>
     </p:spTree>
   </p:cSld>
@@ -4222,6 +2564,13 @@
 <file path=ppt/slides/slide5.xml><?xml version="1.0" encoding="utf-8"?>
 <p:sld xmlns:a="http://schemas.openxmlformats.org/drawingml/2006/main" xmlns:r="http://schemas.openxmlformats.org/officeDocument/2006/relationships" xmlns:p="http://schemas.openxmlformats.org/presentationml/2006/main">
   <p:cSld name="Slide 5">
+    <p:bg>
+      <p:bgPr>
+        <a:solidFill>
+          <a:srgbClr val="FAF8F5"/>
+        </a:solidFill>
+      </p:bgPr>
+    </p:bg>
     <p:spTree>
       <p:nvGrpSpPr>
         <p:cNvPr id="1" name=""/>
@@ -4245,7 +2594,27 @@
         <p:spPr>
           <a:xfrm>
             <a:off x="0" y="0"/>
-            <a:ext cx="9144000" cy="54864"/>
+            <a:ext cx="9144000" cy="822960"/>
+          </a:xfrm>
+          <a:prstGeom prst="rect">
+            <a:avLst/>
+          </a:prstGeom>
+          <a:solidFill>
+            <a:srgbClr val="FFFFFF"/>
+          </a:solidFill>
+          <a:ln/>
+        </p:spPr>
+      </p:sp>
+      <p:sp>
+        <p:nvSpPr>
+          <p:cNvPr id="3" name="Shape 1"/>
+          <p:cNvSpPr/>
+          <p:nvPr/>
+        </p:nvSpPr>
+        <p:spPr>
+          <a:xfrm>
+            <a:off x="0" y="795528"/>
+            <a:ext cx="9144000" cy="27432"/>
           </a:xfrm>
           <a:prstGeom prst="rect">
             <a:avLst/>
@@ -4258,14 +2627,14 @@
       </p:sp>
       <p:sp>
         <p:nvSpPr>
-          <p:cNvPr id="3" name="Text 1"/>
+          <p:cNvPr id="4" name="Text 2"/>
           <p:cNvSpPr/>
           <p:nvPr/>
         </p:nvSpPr>
         <p:spPr>
           <a:xfrm>
-            <a:off x="457200" y="228600"/>
-            <a:ext cx="8229600" cy="548640"/>
+            <a:off x="640080" y="91440"/>
+            <a:ext cx="7863840" cy="640080"/>
           </a:xfrm>
           <a:prstGeom prst="rect">
             <a:avLst/>
@@ -4281,7 +2650,7 @@
               <a:buNone/>
             </a:pPr>
             <a:r>
-              <a:rPr lang="en-US" sz="2400" b="1" dirty="0">
+              <a:rPr lang="en-US" sz="2200" b="1" dirty="0">
                 <a:solidFill>
                   <a:srgbClr val="1B2A4A"/>
                 </a:solidFill>
@@ -4289,31 +2658,11 @@
                 <a:ea typeface="Georgia" pitchFamily="34" charset="-122"/>
                 <a:cs typeface="Georgia" pitchFamily="34" charset="-120"/>
               </a:rPr>
-              <a:t>Key Vocabulary</a:t>
+              <a:t>Equations Recap</a:t>
             </a:r>
-            <a:endParaRPr lang="en-US" sz="2400" dirty="0"/>
+            <a:endParaRPr lang="en-US" sz="2200" dirty="0"/>
           </a:p>
         </p:txBody>
-      </p:sp>
-      <p:sp>
-        <p:nvSpPr>
-          <p:cNvPr id="4" name="Shape 2"/>
-          <p:cNvSpPr/>
-          <p:nvPr/>
-        </p:nvSpPr>
-        <p:spPr>
-          <a:xfrm>
-            <a:off x="457200" y="868680"/>
-            <a:ext cx="1828800" cy="27432"/>
-          </a:xfrm>
-          <a:prstGeom prst="rect">
-            <a:avLst/>
-          </a:prstGeom>
-          <a:solidFill>
-            <a:srgbClr val="C8372D"/>
-          </a:solidFill>
-          <a:ln/>
-        </p:spPr>
       </p:sp>
       <p:sp>
         <p:nvSpPr>
@@ -4323,8 +2672,8 @@
         </p:nvSpPr>
         <p:spPr>
           <a:xfrm>
-            <a:off x="457200" y="1188720"/>
-            <a:ext cx="8229600" cy="548640"/>
+            <a:off x="640080" y="1005840"/>
+            <a:ext cx="7863840" cy="2926080"/>
           </a:xfrm>
           <a:prstGeom prst="rect">
             <a:avLst/>
@@ -4336,141 +2685,109 @@
           <a:bodyPr wrap="square" rtlCol="0" anchor="ctr"/>
           <a:lstStyle/>
           <a:p>
-            <a:pPr indent="0" marL="0">
-              <a:buNone/>
+            <a:pPr marL="342900" indent="-342900">
+              <a:spcAft>
+                <a:spcPts val="800"/>
+              </a:spcAft>
+              <a:buSzPct val="100000"/>
+              <a:buChar char="•"/>
             </a:pPr>
             <a:r>
-              <a:rPr lang="en-US" sz="2800" b="1" dirty="0">
+              <a:rPr lang="en-US" sz="1600" dirty="0">
                 <a:solidFill>
-                  <a:srgbClr val="C8372D"/>
-                </a:solidFill>
-                <a:latin typeface="Georgia" pitchFamily="34" charset="0"/>
-                <a:ea typeface="Georgia" pitchFamily="34" charset="-122"/>
-                <a:cs typeface="Georgia" pitchFamily="34" charset="-120"/>
-              </a:rPr>
-              <a:t>Expand</a:t>
-            </a:r>
-            <a:endParaRPr lang="en-US" sz="2800" dirty="0"/>
-          </a:p>
-        </p:txBody>
-      </p:sp>
-      <p:sp>
-        <p:nvSpPr>
-          <p:cNvPr id="6" name="Text 4"/>
-          <p:cNvSpPr/>
-          <p:nvPr/>
-        </p:nvSpPr>
-        <p:spPr>
-          <a:xfrm>
-            <a:off x="457200" y="1691640"/>
-            <a:ext cx="8229600" cy="365760"/>
-          </a:xfrm>
-          <a:prstGeom prst="rect">
-            <a:avLst/>
-          </a:prstGeom>
-          <a:noFill/>
-          <a:ln/>
-        </p:spPr>
-        <p:txBody>
-          <a:bodyPr wrap="square" rtlCol="0" anchor="ctr"/>
-          <a:lstStyle/>
-          <a:p>
-            <a:pPr indent="0" marL="0">
-              <a:buNone/>
-            </a:pPr>
-            <a:r>
-              <a:rPr lang="en-US" sz="1600" i="1" dirty="0">
-                <a:solidFill>
-                  <a:srgbClr val="9B9690"/>
+                  <a:srgbClr val="3D3A36"/>
                 </a:solidFill>
                 <a:latin typeface="Calibri" pitchFamily="34" charset="0"/>
                 <a:ea typeface="Calibri" pitchFamily="34" charset="-122"/>
                 <a:cs typeface="Calibri" pitchFamily="34" charset="-120"/>
               </a:rPr>
-              <a:t>展开</a:t>
+              <a:t>With brackets: expand first, then solve.</a:t>
             </a:r>
             <a:endParaRPr lang="en-US" sz="1600" dirty="0"/>
           </a:p>
-        </p:txBody>
-      </p:sp>
-      <p:sp>
-        <p:nvSpPr>
-          <p:cNvPr id="7" name="Text 5"/>
-          <p:cNvSpPr/>
-          <p:nvPr/>
-        </p:nvSpPr>
-        <p:spPr>
-          <a:xfrm>
-            <a:off x="457200" y="2194560"/>
-            <a:ext cx="8229600" cy="1828800"/>
-          </a:xfrm>
-          <a:prstGeom prst="rect">
-            <a:avLst/>
-          </a:prstGeom>
-          <a:noFill/>
-          <a:ln/>
-        </p:spPr>
-        <p:txBody>
-          <a:bodyPr wrap="square" rtlCol="0" anchor="ctr"/>
-          <a:lstStyle/>
-          <a:p>
-            <a:pPr indent="0" marL="0">
-              <a:lnSpc>
-                <a:spcPct val="150000"/>
-              </a:lnSpc>
-              <a:buNone/>
+          <a:p>
+            <a:pPr marL="342900" indent="-342900">
+              <a:spcAft>
+                <a:spcPts val="800"/>
+              </a:spcAft>
+              <a:buSzPct val="100000"/>
+              <a:buChar char="•"/>
             </a:pPr>
             <a:r>
-              <a:rPr lang="en-US" sz="1800" dirty="0">
+              <a:rPr lang="en-US" sz="1600" dirty="0">
                 <a:solidFill>
-                  <a:srgbClr val="6B6660"/>
+                  <a:srgbClr val="3D3A36"/>
                 </a:solidFill>
                 <a:latin typeface="Calibri" pitchFamily="34" charset="0"/>
                 <a:ea typeface="Calibri" pitchFamily="34" charset="-122"/>
                 <a:cs typeface="Calibri" pitchFamily="34" charset="-120"/>
               </a:rPr>
-              <a:t>Multiply out brackets. e.g. 3(x + 4) = 3x + 12.</a:t>
+              <a:t>Unknowns on both sides: collect x on one side, numbers on the other.</a:t>
             </a:r>
-            <a:endParaRPr lang="en-US" sz="1800" dirty="0"/>
-          </a:p>
-        </p:txBody>
-      </p:sp>
-      <p:sp>
-        <p:nvSpPr>
-          <p:cNvPr id="8" name="Text 6"/>
-          <p:cNvSpPr/>
-          <p:nvPr/>
-        </p:nvSpPr>
-        <p:spPr>
-          <a:xfrm>
-            <a:off x="7315200" y="4754880"/>
-            <a:ext cx="1828800" cy="274320"/>
-          </a:xfrm>
-          <a:prstGeom prst="rect">
-            <a:avLst/>
-          </a:prstGeom>
-          <a:noFill/>
-          <a:ln/>
-        </p:spPr>
-        <p:txBody>
-          <a:bodyPr wrap="square" rtlCol="0" anchor="ctr"/>
-          <a:lstStyle/>
-          <a:p>
-            <a:pPr algn="r" indent="0" marL="0">
-              <a:buNone/>
+            <a:endParaRPr lang="en-US" sz="1600" dirty="0"/>
+          </a:p>
+          <a:p>
+            <a:pPr marL="342900" indent="-342900">
+              <a:spcAft>
+                <a:spcPts val="800"/>
+              </a:spcAft>
+              <a:buSzPct val="100000"/>
+              <a:buChar char="•"/>
             </a:pPr>
             <a:r>
-              <a:rPr lang="en-US" sz="900" dirty="0">
+              <a:rPr lang="en-US" sz="1600" dirty="0">
                 <a:solidFill>
-                  <a:srgbClr val="9B9690"/>
+                  <a:srgbClr val="3D3A36"/>
                 </a:solidFill>
                 <a:latin typeface="Calibri" pitchFamily="34" charset="0"/>
                 <a:ea typeface="Calibri" pitchFamily="34" charset="-122"/>
                 <a:cs typeface="Calibri" pitchFamily="34" charset="-120"/>
               </a:rPr>
-              <a:t>mrzocchi.com</a:t>
+              <a:t>5x + 3 = 2x + 18 → 3x = 15 → x = 5.</a:t>
             </a:r>
-            <a:endParaRPr lang="en-US" sz="900" dirty="0"/>
+            <a:endParaRPr lang="en-US" sz="1600" dirty="0"/>
+          </a:p>
+          <a:p>
+            <a:pPr marL="342900" indent="-342900">
+              <a:spcAft>
+                <a:spcPts val="800"/>
+              </a:spcAft>
+              <a:buSzPct val="100000"/>
+              <a:buChar char="•"/>
+            </a:pPr>
+            <a:r>
+              <a:rPr lang="en-US" sz="1600" dirty="0">
+                <a:solidFill>
+                  <a:srgbClr val="3D3A36"/>
+                </a:solidFill>
+                <a:latin typeface="Calibri" pitchFamily="34" charset="0"/>
+                <a:ea typeface="Calibri" pitchFamily="34" charset="-122"/>
+                <a:cs typeface="Calibri" pitchFamily="34" charset="-120"/>
+              </a:rPr>
+              <a:t>With fractions: multiply by denominator to clear.</a:t>
+            </a:r>
+            <a:endParaRPr lang="en-US" sz="1600" dirty="0"/>
+          </a:p>
+          <a:p>
+            <a:pPr marL="342900" indent="-342900">
+              <a:spcAft>
+                <a:spcPts val="800"/>
+              </a:spcAft>
+              <a:buSzPct val="100000"/>
+              <a:buChar char="•"/>
+            </a:pPr>
+            <a:r>
+              <a:rPr lang="en-US" sz="1600" dirty="0">
+                <a:solidFill>
+                  <a:srgbClr val="3D3A36"/>
+                </a:solidFill>
+                <a:latin typeface="Calibri" pitchFamily="34" charset="0"/>
+                <a:ea typeface="Calibri" pitchFamily="34" charset="-122"/>
+                <a:cs typeface="Calibri" pitchFamily="34" charset="-120"/>
+              </a:rPr>
+              <a:t>Always check your answer by substituting back.</a:t>
+            </a:r>
+            <a:endParaRPr lang="en-US" sz="1600" dirty="0"/>
           </a:p>
         </p:txBody>
       </p:sp>
@@ -4508,13 +2825,13 @@
         <p:spPr>
           <a:xfrm>
             <a:off x="0" y="0"/>
-            <a:ext cx="9144000" cy="54864"/>
+            <a:ext cx="9144000" cy="5143500"/>
           </a:xfrm>
           <a:prstGeom prst="rect">
             <a:avLst/>
           </a:prstGeom>
           <a:solidFill>
-            <a:srgbClr val="C8372D"/>
+            <a:srgbClr val="111D35"/>
           </a:solidFill>
           <a:ln/>
         </p:spPr>
@@ -4527,67 +2844,8 @@
         </p:nvSpPr>
         <p:spPr>
           <a:xfrm>
-            <a:off x="457200" y="228600"/>
-            <a:ext cx="8229600" cy="548640"/>
-          </a:xfrm>
-          <a:prstGeom prst="rect">
-            <a:avLst/>
-          </a:prstGeom>
-          <a:noFill/>
-          <a:ln/>
-        </p:spPr>
-        <p:txBody>
-          <a:bodyPr wrap="square" lIns="0" tIns="0" rIns="0" bIns="0" rtlCol="0" anchor="ctr"/>
-          <a:lstStyle/>
-          <a:p>
-            <a:pPr indent="0" marL="0">
-              <a:buNone/>
-            </a:pPr>
-            <a:r>
-              <a:rPr lang="en-US" sz="2400" b="1" dirty="0">
-                <a:solidFill>
-                  <a:srgbClr val="1B2A4A"/>
-                </a:solidFill>
-                <a:latin typeface="Georgia" pitchFamily="34" charset="0"/>
-                <a:ea typeface="Georgia" pitchFamily="34" charset="-122"/>
-                <a:cs typeface="Georgia" pitchFamily="34" charset="-120"/>
-              </a:rPr>
-              <a:t>Key Vocabulary</a:t>
-            </a:r>
-            <a:endParaRPr lang="en-US" sz="2400" dirty="0"/>
-          </a:p>
-        </p:txBody>
-      </p:sp>
-      <p:sp>
-        <p:nvSpPr>
-          <p:cNvPr id="4" name="Shape 2"/>
-          <p:cNvSpPr/>
-          <p:nvPr/>
-        </p:nvSpPr>
-        <p:spPr>
-          <a:xfrm>
-            <a:off x="457200" y="868680"/>
-            <a:ext cx="1828800" cy="27432"/>
-          </a:xfrm>
-          <a:prstGeom prst="rect">
-            <a:avLst/>
-          </a:prstGeom>
-          <a:solidFill>
-            <a:srgbClr val="C8372D"/>
-          </a:solidFill>
-          <a:ln/>
-        </p:spPr>
-      </p:sp>
-      <p:sp>
-        <p:nvSpPr>
-          <p:cNvPr id="5" name="Text 3"/>
-          <p:cNvSpPr/>
-          <p:nvPr/>
-        </p:nvSpPr>
-        <p:spPr>
-          <a:xfrm>
-            <a:off x="457200" y="1188720"/>
-            <a:ext cx="8229600" cy="548640"/>
+            <a:off x="731520" y="914400"/>
+            <a:ext cx="1828800" cy="1097280"/>
           </a:xfrm>
           <a:prstGeom prst="rect">
             <a:avLst/>
@@ -4603,30 +2861,32 @@
               <a:buNone/>
             </a:pPr>
             <a:r>
-              <a:rPr lang="en-US" sz="2800" b="1" dirty="0">
+              <a:rPr lang="en-US" sz="7200" b="1" dirty="0">
                 <a:solidFill>
-                  <a:srgbClr val="C8372D"/>
+                  <a:srgbClr val="C8372D">
+                    <a:alpha val="70000"/>
+                  </a:srgbClr>
                 </a:solidFill>
                 <a:latin typeface="Georgia" pitchFamily="34" charset="0"/>
                 <a:ea typeface="Georgia" pitchFamily="34" charset="-122"/>
                 <a:cs typeface="Georgia" pitchFamily="34" charset="-120"/>
               </a:rPr>
-              <a:t>Factorise</a:t>
+              <a:t>03</a:t>
             </a:r>
-            <a:endParaRPr lang="en-US" sz="2800" dirty="0"/>
+            <a:endParaRPr lang="en-US" sz="7200" dirty="0"/>
           </a:p>
         </p:txBody>
       </p:sp>
       <p:sp>
         <p:nvSpPr>
-          <p:cNvPr id="6" name="Text 4"/>
+          <p:cNvPr id="4" name="Text 2"/>
           <p:cNvSpPr/>
           <p:nvPr/>
         </p:nvSpPr>
         <p:spPr>
           <a:xfrm>
-            <a:off x="457200" y="1691640"/>
-            <a:ext cx="8229600" cy="365760"/>
+            <a:off x="731520" y="2011680"/>
+            <a:ext cx="7680960" cy="1097280"/>
           </a:xfrm>
           <a:prstGeom prst="rect">
             <a:avLst/>
@@ -4642,100 +2902,39 @@
               <a:buNone/>
             </a:pPr>
             <a:r>
-              <a:rPr lang="en-US" sz="1600" i="1" dirty="0">
+              <a:rPr lang="en-US" sz="3200" b="1" dirty="0">
                 <a:solidFill>
-                  <a:srgbClr val="9B9690"/>
+                  <a:srgbClr val="FFFFFF"/>
                 </a:solidFill>
-                <a:latin typeface="Calibri" pitchFamily="34" charset="0"/>
-                <a:ea typeface="Calibri" pitchFamily="34" charset="-122"/>
-                <a:cs typeface="Calibri" pitchFamily="34" charset="-120"/>
+                <a:latin typeface="Georgia" pitchFamily="34" charset="0"/>
+                <a:ea typeface="Georgia" pitchFamily="34" charset="-122"/>
+                <a:cs typeface="Georgia" pitchFamily="34" charset="-120"/>
               </a:rPr>
-              <a:t>因式分解</a:t>
+              <a:t>Inequalities</a:t>
             </a:r>
-            <a:endParaRPr lang="en-US" sz="1600" dirty="0"/>
+            <a:endParaRPr lang="en-US" sz="3200" dirty="0"/>
           </a:p>
         </p:txBody>
       </p:sp>
       <p:sp>
         <p:nvSpPr>
-          <p:cNvPr id="7" name="Text 5"/>
+          <p:cNvPr id="5" name="Shape 3"/>
           <p:cNvSpPr/>
           <p:nvPr/>
         </p:nvSpPr>
         <p:spPr>
           <a:xfrm>
-            <a:off x="457200" y="2194560"/>
-            <a:ext cx="8229600" cy="1828800"/>
+            <a:off x="731520" y="3200400"/>
+            <a:ext cx="1828800" cy="54864"/>
           </a:xfrm>
           <a:prstGeom prst="rect">
             <a:avLst/>
           </a:prstGeom>
-          <a:noFill/>
+          <a:solidFill>
+            <a:srgbClr val="C8372D"/>
+          </a:solidFill>
           <a:ln/>
         </p:spPr>
-        <p:txBody>
-          <a:bodyPr wrap="square" rtlCol="0" anchor="ctr"/>
-          <a:lstStyle/>
-          <a:p>
-            <a:pPr indent="0" marL="0">
-              <a:lnSpc>
-                <a:spcPct val="150000"/>
-              </a:lnSpc>
-              <a:buNone/>
-            </a:pPr>
-            <a:r>
-              <a:rPr lang="en-US" sz="1800" dirty="0">
-                <a:solidFill>
-                  <a:srgbClr val="6B6660"/>
-                </a:solidFill>
-                <a:latin typeface="Calibri" pitchFamily="34" charset="0"/>
-                <a:ea typeface="Calibri" pitchFamily="34" charset="-122"/>
-                <a:cs typeface="Calibri" pitchFamily="34" charset="-120"/>
-              </a:rPr>
-              <a:t>The reverse of expanding — take out a common factor. e.g. 6x + 12 = 6(x + 2).</a:t>
-            </a:r>
-            <a:endParaRPr lang="en-US" sz="1800" dirty="0"/>
-          </a:p>
-        </p:txBody>
-      </p:sp>
-      <p:sp>
-        <p:nvSpPr>
-          <p:cNvPr id="8" name="Text 6"/>
-          <p:cNvSpPr/>
-          <p:nvPr/>
-        </p:nvSpPr>
-        <p:spPr>
-          <a:xfrm>
-            <a:off x="7315200" y="4754880"/>
-            <a:ext cx="1828800" cy="274320"/>
-          </a:xfrm>
-          <a:prstGeom prst="rect">
-            <a:avLst/>
-          </a:prstGeom>
-          <a:noFill/>
-          <a:ln/>
-        </p:spPr>
-        <p:txBody>
-          <a:bodyPr wrap="square" rtlCol="0" anchor="ctr"/>
-          <a:lstStyle/>
-          <a:p>
-            <a:pPr algn="r" indent="0" marL="0">
-              <a:buNone/>
-            </a:pPr>
-            <a:r>
-              <a:rPr lang="en-US" sz="900" dirty="0">
-                <a:solidFill>
-                  <a:srgbClr val="9B9690"/>
-                </a:solidFill>
-                <a:latin typeface="Calibri" pitchFamily="34" charset="0"/>
-                <a:ea typeface="Calibri" pitchFamily="34" charset="-122"/>
-                <a:cs typeface="Calibri" pitchFamily="34" charset="-120"/>
-              </a:rPr>
-              <a:t>mrzocchi.com</a:t>
-            </a:r>
-            <a:endParaRPr lang="en-US" sz="900" dirty="0"/>
-          </a:p>
-        </p:txBody>
       </p:sp>
     </p:spTree>
   </p:cSld>
@@ -4748,6 +2947,13 @@
 <file path=ppt/slides/slide7.xml><?xml version="1.0" encoding="utf-8"?>
 <p:sld xmlns:a="http://schemas.openxmlformats.org/drawingml/2006/main" xmlns:r="http://schemas.openxmlformats.org/officeDocument/2006/relationships" xmlns:p="http://schemas.openxmlformats.org/presentationml/2006/main">
   <p:cSld name="Slide 7">
+    <p:bg>
+      <p:bgPr>
+        <a:solidFill>
+          <a:srgbClr val="FAF8F5"/>
+        </a:solidFill>
+      </p:bgPr>
+    </p:bg>
     <p:spTree>
       <p:nvGrpSpPr>
         <p:cNvPr id="1" name=""/>
@@ -4771,7 +2977,27 @@
         <p:spPr>
           <a:xfrm>
             <a:off x="0" y="0"/>
-            <a:ext cx="9144000" cy="54864"/>
+            <a:ext cx="9144000" cy="822960"/>
+          </a:xfrm>
+          <a:prstGeom prst="rect">
+            <a:avLst/>
+          </a:prstGeom>
+          <a:solidFill>
+            <a:srgbClr val="FFFFFF"/>
+          </a:solidFill>
+          <a:ln/>
+        </p:spPr>
+      </p:sp>
+      <p:sp>
+        <p:nvSpPr>
+          <p:cNvPr id="3" name="Shape 1"/>
+          <p:cNvSpPr/>
+          <p:nvPr/>
+        </p:nvSpPr>
+        <p:spPr>
+          <a:xfrm>
+            <a:off x="0" y="795528"/>
+            <a:ext cx="9144000" cy="27432"/>
           </a:xfrm>
           <a:prstGeom prst="rect">
             <a:avLst/>
@@ -4784,14 +3010,14 @@
       </p:sp>
       <p:sp>
         <p:nvSpPr>
-          <p:cNvPr id="3" name="Text 1"/>
+          <p:cNvPr id="4" name="Text 2"/>
           <p:cNvSpPr/>
           <p:nvPr/>
         </p:nvSpPr>
         <p:spPr>
           <a:xfrm>
-            <a:off x="457200" y="228600"/>
-            <a:ext cx="8229600" cy="548640"/>
+            <a:off x="640080" y="91440"/>
+            <a:ext cx="7863840" cy="640080"/>
           </a:xfrm>
           <a:prstGeom prst="rect">
             <a:avLst/>
@@ -4807,7 +3033,7 @@
               <a:buNone/>
             </a:pPr>
             <a:r>
-              <a:rPr lang="en-US" sz="2400" b="1" dirty="0">
+              <a:rPr lang="en-US" sz="2200" b="1" dirty="0">
                 <a:solidFill>
                   <a:srgbClr val="1B2A4A"/>
                 </a:solidFill>
@@ -4815,31 +3041,11 @@
                 <a:ea typeface="Georgia" pitchFamily="34" charset="-122"/>
                 <a:cs typeface="Georgia" pitchFamily="34" charset="-120"/>
               </a:rPr>
-              <a:t>Key Vocabulary</a:t>
+              <a:t>Inequalities Recap</a:t>
             </a:r>
-            <a:endParaRPr lang="en-US" sz="2400" dirty="0"/>
+            <a:endParaRPr lang="en-US" sz="2200" dirty="0"/>
           </a:p>
         </p:txBody>
-      </p:sp>
-      <p:sp>
-        <p:nvSpPr>
-          <p:cNvPr id="4" name="Shape 2"/>
-          <p:cNvSpPr/>
-          <p:nvPr/>
-        </p:nvSpPr>
-        <p:spPr>
-          <a:xfrm>
-            <a:off x="457200" y="868680"/>
-            <a:ext cx="1828800" cy="27432"/>
-          </a:xfrm>
-          <a:prstGeom prst="rect">
-            <a:avLst/>
-          </a:prstGeom>
-          <a:solidFill>
-            <a:srgbClr val="C8372D"/>
-          </a:solidFill>
-          <a:ln/>
-        </p:spPr>
       </p:sp>
       <p:sp>
         <p:nvSpPr>
@@ -4849,8 +3055,8 @@
         </p:nvSpPr>
         <p:spPr>
           <a:xfrm>
-            <a:off x="457200" y="1188720"/>
-            <a:ext cx="8229600" cy="548640"/>
+            <a:off x="640080" y="1005840"/>
+            <a:ext cx="7863840" cy="2926080"/>
           </a:xfrm>
           <a:prstGeom prst="rect">
             <a:avLst/>
@@ -4862,141 +3068,88 @@
           <a:bodyPr wrap="square" rtlCol="0" anchor="ctr"/>
           <a:lstStyle/>
           <a:p>
-            <a:pPr indent="0" marL="0">
-              <a:buNone/>
+            <a:pPr marL="342900" indent="-342900">
+              <a:spcAft>
+                <a:spcPts val="800"/>
+              </a:spcAft>
+              <a:buSzPct val="100000"/>
+              <a:buChar char="•"/>
             </a:pPr>
             <a:r>
-              <a:rPr lang="en-US" sz="2800" b="1" dirty="0">
+              <a:rPr lang="en-US" sz="1600" dirty="0">
                 <a:solidFill>
-                  <a:srgbClr val="C8372D"/>
-                </a:solidFill>
-                <a:latin typeface="Georgia" pitchFamily="34" charset="0"/>
-                <a:ea typeface="Georgia" pitchFamily="34" charset="-122"/>
-                <a:cs typeface="Georgia" pitchFamily="34" charset="-120"/>
-              </a:rPr>
-              <a:t>Inequality</a:t>
-            </a:r>
-            <a:endParaRPr lang="en-US" sz="2800" dirty="0"/>
-          </a:p>
-        </p:txBody>
-      </p:sp>
-      <p:sp>
-        <p:nvSpPr>
-          <p:cNvPr id="6" name="Text 4"/>
-          <p:cNvSpPr/>
-          <p:nvPr/>
-        </p:nvSpPr>
-        <p:spPr>
-          <a:xfrm>
-            <a:off x="457200" y="1691640"/>
-            <a:ext cx="8229600" cy="365760"/>
-          </a:xfrm>
-          <a:prstGeom prst="rect">
-            <a:avLst/>
-          </a:prstGeom>
-          <a:noFill/>
-          <a:ln/>
-        </p:spPr>
-        <p:txBody>
-          <a:bodyPr wrap="square" rtlCol="0" anchor="ctr"/>
-          <a:lstStyle/>
-          <a:p>
-            <a:pPr indent="0" marL="0">
-              <a:buNone/>
-            </a:pPr>
-            <a:r>
-              <a:rPr lang="en-US" sz="1600" i="1" dirty="0">
-                <a:solidFill>
-                  <a:srgbClr val="9B9690"/>
+                  <a:srgbClr val="3D3A36"/>
                 </a:solidFill>
                 <a:latin typeface="Calibri" pitchFamily="34" charset="0"/>
                 <a:ea typeface="Calibri" pitchFamily="34" charset="-122"/>
                 <a:cs typeface="Calibri" pitchFamily="34" charset="-120"/>
               </a:rPr>
-              <a:t>不等式</a:t>
+              <a:t>Solve like equations but keep the inequality sign.</a:t>
             </a:r>
             <a:endParaRPr lang="en-US" sz="1600" dirty="0"/>
           </a:p>
-        </p:txBody>
-      </p:sp>
-      <p:sp>
-        <p:nvSpPr>
-          <p:cNvPr id="7" name="Text 5"/>
-          <p:cNvSpPr/>
-          <p:nvPr/>
-        </p:nvSpPr>
-        <p:spPr>
-          <a:xfrm>
-            <a:off x="457200" y="2194560"/>
-            <a:ext cx="8229600" cy="1828800"/>
-          </a:xfrm>
-          <a:prstGeom prst="rect">
-            <a:avLst/>
-          </a:prstGeom>
-          <a:noFill/>
-          <a:ln/>
-        </p:spPr>
-        <p:txBody>
-          <a:bodyPr wrap="square" rtlCol="0" anchor="ctr"/>
-          <a:lstStyle/>
-          <a:p>
-            <a:pPr indent="0" marL="0">
-              <a:lnSpc>
-                <a:spcPct val="150000"/>
-              </a:lnSpc>
-              <a:buNone/>
+          <a:p>
+            <a:pPr marL="342900" indent="-342900">
+              <a:spcAft>
+                <a:spcPts val="800"/>
+              </a:spcAft>
+              <a:buSzPct val="100000"/>
+              <a:buChar char="•"/>
             </a:pPr>
             <a:r>
-              <a:rPr lang="en-US" sz="1800" dirty="0">
+              <a:rPr lang="en-US" sz="1600" dirty="0">
                 <a:solidFill>
-                  <a:srgbClr val="6B6660"/>
+                  <a:srgbClr val="3D3A36"/>
                 </a:solidFill>
                 <a:latin typeface="Calibri" pitchFamily="34" charset="0"/>
                 <a:ea typeface="Calibri" pitchFamily="34" charset="-122"/>
                 <a:cs typeface="Calibri" pitchFamily="34" charset="-120"/>
               </a:rPr>
-              <a:t>Uses &lt; &gt; ≤ ≥ instead of =. Shows a range of values. e.g. x &gt; 3.</a:t>
+              <a:t>FLIP the sign when multiplying/dividing by a NEGATIVE.</a:t>
             </a:r>
-            <a:endParaRPr lang="en-US" sz="1800" dirty="0"/>
-          </a:p>
-        </p:txBody>
-      </p:sp>
-      <p:sp>
-        <p:nvSpPr>
-          <p:cNvPr id="8" name="Text 6"/>
-          <p:cNvSpPr/>
-          <p:nvPr/>
-        </p:nvSpPr>
-        <p:spPr>
-          <a:xfrm>
-            <a:off x="7315200" y="4754880"/>
-            <a:ext cx="1828800" cy="274320"/>
-          </a:xfrm>
-          <a:prstGeom prst="rect">
-            <a:avLst/>
-          </a:prstGeom>
-          <a:noFill/>
-          <a:ln/>
-        </p:spPr>
-        <p:txBody>
-          <a:bodyPr wrap="square" rtlCol="0" anchor="ctr"/>
-          <a:lstStyle/>
-          <a:p>
-            <a:pPr algn="r" indent="0" marL="0">
-              <a:buNone/>
+            <a:endParaRPr lang="en-US" sz="1600" dirty="0"/>
+          </a:p>
+          <a:p>
+            <a:pPr marL="342900" indent="-342900">
+              <a:spcAft>
+                <a:spcPts val="800"/>
+              </a:spcAft>
+              <a:buSzPct val="100000"/>
+              <a:buChar char="•"/>
             </a:pPr>
             <a:r>
-              <a:rPr lang="en-US" sz="900" dirty="0">
+              <a:rPr lang="en-US" sz="1600" dirty="0">
                 <a:solidFill>
-                  <a:srgbClr val="9B9690"/>
+                  <a:srgbClr val="3D3A36"/>
                 </a:solidFill>
                 <a:latin typeface="Calibri" pitchFamily="34" charset="0"/>
                 <a:ea typeface="Calibri" pitchFamily="34" charset="-122"/>
                 <a:cs typeface="Calibri" pitchFamily="34" charset="-120"/>
               </a:rPr>
-              <a:t>mrzocchi.com</a:t>
+              <a:t>Number line: open circle for &lt; &gt;, closed circle for ≤ ≥.</a:t>
             </a:r>
-            <a:endParaRPr lang="en-US" sz="900" dirty="0"/>
+            <a:endParaRPr lang="en-US" sz="1600" dirty="0"/>
+          </a:p>
+          <a:p>
+            <a:pPr marL="342900" indent="-342900">
+              <a:spcAft>
+                <a:spcPts val="800"/>
+              </a:spcAft>
+              <a:buSzPct val="100000"/>
+              <a:buChar char="•"/>
+            </a:pPr>
+            <a:r>
+              <a:rPr lang="en-US" sz="1600" dirty="0">
+                <a:solidFill>
+                  <a:srgbClr val="3D3A36"/>
+                </a:solidFill>
+                <a:latin typeface="Calibri" pitchFamily="34" charset="0"/>
+                <a:ea typeface="Calibri" pitchFamily="34" charset="-122"/>
+                <a:cs typeface="Calibri" pitchFamily="34" charset="-120"/>
+              </a:rPr>
+              <a:t>Double inequalities: 2 ≤ x &lt; 7 means x is between 2 and 7.</a:t>
+            </a:r>
+            <a:endParaRPr lang="en-US" sz="1600" dirty="0"/>
           </a:p>
         </p:txBody>
       </p:sp>
@@ -5034,13 +3187,13 @@
         <p:spPr>
           <a:xfrm>
             <a:off x="0" y="0"/>
-            <a:ext cx="9144000" cy="54864"/>
+            <a:ext cx="9144000" cy="5143500"/>
           </a:xfrm>
           <a:prstGeom prst="rect">
             <a:avLst/>
           </a:prstGeom>
           <a:solidFill>
-            <a:srgbClr val="C8372D"/>
+            <a:srgbClr val="111D35"/>
           </a:solidFill>
           <a:ln/>
         </p:spPr>
@@ -5053,67 +3206,8 @@
         </p:nvSpPr>
         <p:spPr>
           <a:xfrm>
-            <a:off x="457200" y="228600"/>
-            <a:ext cx="8229600" cy="548640"/>
-          </a:xfrm>
-          <a:prstGeom prst="rect">
-            <a:avLst/>
-          </a:prstGeom>
-          <a:noFill/>
-          <a:ln/>
-        </p:spPr>
-        <p:txBody>
-          <a:bodyPr wrap="square" lIns="0" tIns="0" rIns="0" bIns="0" rtlCol="0" anchor="ctr"/>
-          <a:lstStyle/>
-          <a:p>
-            <a:pPr indent="0" marL="0">
-              <a:buNone/>
-            </a:pPr>
-            <a:r>
-              <a:rPr lang="en-US" sz="2400" b="1" dirty="0">
-                <a:solidFill>
-                  <a:srgbClr val="1B2A4A"/>
-                </a:solidFill>
-                <a:latin typeface="Georgia" pitchFamily="34" charset="0"/>
-                <a:ea typeface="Georgia" pitchFamily="34" charset="-122"/>
-                <a:cs typeface="Georgia" pitchFamily="34" charset="-120"/>
-              </a:rPr>
-              <a:t>Key Vocabulary</a:t>
-            </a:r>
-            <a:endParaRPr lang="en-US" sz="2400" dirty="0"/>
-          </a:p>
-        </p:txBody>
-      </p:sp>
-      <p:sp>
-        <p:nvSpPr>
-          <p:cNvPr id="4" name="Shape 2"/>
-          <p:cNvSpPr/>
-          <p:nvPr/>
-        </p:nvSpPr>
-        <p:spPr>
-          <a:xfrm>
-            <a:off x="457200" y="868680"/>
-            <a:ext cx="1828800" cy="27432"/>
-          </a:xfrm>
-          <a:prstGeom prst="rect">
-            <a:avLst/>
-          </a:prstGeom>
-          <a:solidFill>
-            <a:srgbClr val="C8372D"/>
-          </a:solidFill>
-          <a:ln/>
-        </p:spPr>
-      </p:sp>
-      <p:sp>
-        <p:nvSpPr>
-          <p:cNvPr id="5" name="Text 3"/>
-          <p:cNvSpPr/>
-          <p:nvPr/>
-        </p:nvSpPr>
-        <p:spPr>
-          <a:xfrm>
-            <a:off x="457200" y="1188720"/>
-            <a:ext cx="8229600" cy="548640"/>
+            <a:off x="731520" y="914400"/>
+            <a:ext cx="1828800" cy="1097280"/>
           </a:xfrm>
           <a:prstGeom prst="rect">
             <a:avLst/>
@@ -5129,30 +3223,32 @@
               <a:buNone/>
             </a:pPr>
             <a:r>
-              <a:rPr lang="en-US" sz="2800" b="1" dirty="0">
+              <a:rPr lang="en-US" sz="7200" b="1" dirty="0">
                 <a:solidFill>
-                  <a:srgbClr val="C8372D"/>
+                  <a:srgbClr val="C8372D">
+                    <a:alpha val="70000"/>
+                  </a:srgbClr>
                 </a:solidFill>
                 <a:latin typeface="Georgia" pitchFamily="34" charset="0"/>
                 <a:ea typeface="Georgia" pitchFamily="34" charset="-122"/>
                 <a:cs typeface="Georgia" pitchFamily="34" charset="-120"/>
               </a:rPr>
-              <a:t>Like Terms</a:t>
+              <a:t>04</a:t>
             </a:r>
-            <a:endParaRPr lang="en-US" sz="2800" dirty="0"/>
+            <a:endParaRPr lang="en-US" sz="7200" dirty="0"/>
           </a:p>
         </p:txBody>
       </p:sp>
       <p:sp>
         <p:nvSpPr>
-          <p:cNvPr id="6" name="Text 4"/>
+          <p:cNvPr id="4" name="Text 2"/>
           <p:cNvSpPr/>
           <p:nvPr/>
         </p:nvSpPr>
         <p:spPr>
           <a:xfrm>
-            <a:off x="457200" y="1691640"/>
-            <a:ext cx="8229600" cy="365760"/>
+            <a:off x="731520" y="2011680"/>
+            <a:ext cx="7680960" cy="1097280"/>
           </a:xfrm>
           <a:prstGeom prst="rect">
             <a:avLst/>
@@ -5168,100 +3264,39 @@
               <a:buNone/>
             </a:pPr>
             <a:r>
-              <a:rPr lang="en-US" sz="1600" i="1" dirty="0">
+              <a:rPr lang="en-US" sz="3200" b="1" dirty="0">
                 <a:solidFill>
-                  <a:srgbClr val="9B9690"/>
+                  <a:srgbClr val="FFFFFF"/>
                 </a:solidFill>
-                <a:latin typeface="Calibri" pitchFamily="34" charset="0"/>
-                <a:ea typeface="Calibri" pitchFamily="34" charset="-122"/>
-                <a:cs typeface="Calibri" pitchFamily="34" charset="-120"/>
+                <a:latin typeface="Georgia" pitchFamily="34" charset="0"/>
+                <a:ea typeface="Georgia" pitchFamily="34" charset="-122"/>
+                <a:cs typeface="Georgia" pitchFamily="34" charset="-120"/>
               </a:rPr>
-              <a:t>同类项</a:t>
+              <a:t>Sequences &amp; Graphs</a:t>
             </a:r>
-            <a:endParaRPr lang="en-US" sz="1600" dirty="0"/>
+            <a:endParaRPr lang="en-US" sz="3200" dirty="0"/>
           </a:p>
         </p:txBody>
       </p:sp>
       <p:sp>
         <p:nvSpPr>
-          <p:cNvPr id="7" name="Text 5"/>
+          <p:cNvPr id="5" name="Shape 3"/>
           <p:cNvSpPr/>
           <p:nvPr/>
         </p:nvSpPr>
         <p:spPr>
           <a:xfrm>
-            <a:off x="457200" y="2194560"/>
-            <a:ext cx="8229600" cy="1828800"/>
+            <a:off x="731520" y="3200400"/>
+            <a:ext cx="1828800" cy="54864"/>
           </a:xfrm>
           <a:prstGeom prst="rect">
             <a:avLst/>
           </a:prstGeom>
-          <a:noFill/>
+          <a:solidFill>
+            <a:srgbClr val="C8372D"/>
+          </a:solidFill>
           <a:ln/>
         </p:spPr>
-        <p:txBody>
-          <a:bodyPr wrap="square" rtlCol="0" anchor="ctr"/>
-          <a:lstStyle/>
-          <a:p>
-            <a:pPr indent="0" marL="0">
-              <a:lnSpc>
-                <a:spcPct val="150000"/>
-              </a:lnSpc>
-              <a:buNone/>
-            </a:pPr>
-            <a:r>
-              <a:rPr lang="en-US" sz="1800" dirty="0">
-                <a:solidFill>
-                  <a:srgbClr val="6B6660"/>
-                </a:solidFill>
-                <a:latin typeface="Calibri" pitchFamily="34" charset="0"/>
-                <a:ea typeface="Calibri" pitchFamily="34" charset="-122"/>
-                <a:cs typeface="Calibri" pitchFamily="34" charset="-120"/>
-              </a:rPr>
-              <a:t>Terms with the same variable and power. 5x and 3x are like terms. 5x and 5x² are not.</a:t>
-            </a:r>
-            <a:endParaRPr lang="en-US" sz="1800" dirty="0"/>
-          </a:p>
-        </p:txBody>
-      </p:sp>
-      <p:sp>
-        <p:nvSpPr>
-          <p:cNvPr id="8" name="Text 6"/>
-          <p:cNvSpPr/>
-          <p:nvPr/>
-        </p:nvSpPr>
-        <p:spPr>
-          <a:xfrm>
-            <a:off x="7315200" y="4754880"/>
-            <a:ext cx="1828800" cy="274320"/>
-          </a:xfrm>
-          <a:prstGeom prst="rect">
-            <a:avLst/>
-          </a:prstGeom>
-          <a:noFill/>
-          <a:ln/>
-        </p:spPr>
-        <p:txBody>
-          <a:bodyPr wrap="square" rtlCol="0" anchor="ctr"/>
-          <a:lstStyle/>
-          <a:p>
-            <a:pPr algn="r" indent="0" marL="0">
-              <a:buNone/>
-            </a:pPr>
-            <a:r>
-              <a:rPr lang="en-US" sz="900" dirty="0">
-                <a:solidFill>
-                  <a:srgbClr val="9B9690"/>
-                </a:solidFill>
-                <a:latin typeface="Calibri" pitchFamily="34" charset="0"/>
-                <a:ea typeface="Calibri" pitchFamily="34" charset="-122"/>
-                <a:cs typeface="Calibri" pitchFamily="34" charset="-120"/>
-              </a:rPr>
-              <a:t>mrzocchi.com</a:t>
-            </a:r>
-            <a:endParaRPr lang="en-US" sz="900" dirty="0"/>
-          </a:p>
-        </p:txBody>
       </p:sp>
     </p:spTree>
   </p:cSld>
@@ -5274,6 +3309,13 @@
 <file path=ppt/slides/slide9.xml><?xml version="1.0" encoding="utf-8"?>
 <p:sld xmlns:a="http://schemas.openxmlformats.org/drawingml/2006/main" xmlns:r="http://schemas.openxmlformats.org/officeDocument/2006/relationships" xmlns:p="http://schemas.openxmlformats.org/presentationml/2006/main">
   <p:cSld name="Slide 9">
+    <p:bg>
+      <p:bgPr>
+        <a:solidFill>
+          <a:srgbClr val="FAF8F5"/>
+        </a:solidFill>
+      </p:bgPr>
+    </p:bg>
     <p:spTree>
       <p:nvGrpSpPr>
         <p:cNvPr id="1" name=""/>
@@ -5297,7 +3339,27 @@
         <p:spPr>
           <a:xfrm>
             <a:off x="0" y="0"/>
-            <a:ext cx="9144000" cy="54864"/>
+            <a:ext cx="9144000" cy="822960"/>
+          </a:xfrm>
+          <a:prstGeom prst="rect">
+            <a:avLst/>
+          </a:prstGeom>
+          <a:solidFill>
+            <a:srgbClr val="FFFFFF"/>
+          </a:solidFill>
+          <a:ln/>
+        </p:spPr>
+      </p:sp>
+      <p:sp>
+        <p:nvSpPr>
+          <p:cNvPr id="3" name="Shape 1"/>
+          <p:cNvSpPr/>
+          <p:nvPr/>
+        </p:nvSpPr>
+        <p:spPr>
+          <a:xfrm>
+            <a:off x="0" y="795528"/>
+            <a:ext cx="9144000" cy="27432"/>
           </a:xfrm>
           <a:prstGeom prst="rect">
             <a:avLst/>
@@ -5310,14 +3372,14 @@
       </p:sp>
       <p:sp>
         <p:nvSpPr>
-          <p:cNvPr id="3" name="Text 1"/>
+          <p:cNvPr id="4" name="Text 2"/>
           <p:cNvSpPr/>
           <p:nvPr/>
         </p:nvSpPr>
         <p:spPr>
           <a:xfrm>
-            <a:off x="457200" y="228600"/>
-            <a:ext cx="8229600" cy="548640"/>
+            <a:off x="640080" y="91440"/>
+            <a:ext cx="7863840" cy="640080"/>
           </a:xfrm>
           <a:prstGeom prst="rect">
             <a:avLst/>
@@ -5333,7 +3395,7 @@
               <a:buNone/>
             </a:pPr>
             <a:r>
-              <a:rPr lang="en-US" sz="2400" b="1" dirty="0">
+              <a:rPr lang="en-US" sz="2200" b="1" dirty="0">
                 <a:solidFill>
                   <a:srgbClr val="1B2A4A"/>
                 </a:solidFill>
@@ -5341,221 +3403,1037 @@
                 <a:ea typeface="Georgia" pitchFamily="34" charset="-122"/>
                 <a:cs typeface="Georgia" pitchFamily="34" charset="-120"/>
               </a:rPr>
-              <a:t>Check Your Understanding</a:t>
+              <a:t>Key Formulas</a:t>
             </a:r>
-            <a:endParaRPr lang="en-US" sz="2400" dirty="0"/>
+            <a:endParaRPr lang="en-US" sz="2200" dirty="0"/>
           </a:p>
         </p:txBody>
       </p:sp>
-      <p:sp>
-        <p:nvSpPr>
-          <p:cNvPr id="4" name="Shape 2"/>
-          <p:cNvSpPr/>
-          <p:nvPr/>
-        </p:nvSpPr>
-        <p:spPr>
-          <a:xfrm>
-            <a:off x="457200" y="868680"/>
-            <a:ext cx="1828800" cy="27432"/>
-          </a:xfrm>
-          <a:prstGeom prst="rect">
-            <a:avLst/>
-          </a:prstGeom>
-          <a:solidFill>
-            <a:srgbClr val="C8372D"/>
-          </a:solidFill>
-          <a:ln/>
-        </p:spPr>
-      </p:sp>
-      <p:sp>
-        <p:nvSpPr>
-          <p:cNvPr id="5" name="Shape 3"/>
-          <p:cNvSpPr/>
-          <p:nvPr/>
-        </p:nvSpPr>
-        <p:spPr>
-          <a:xfrm>
-            <a:off x="457200" y="1188720"/>
-            <a:ext cx="8229600" cy="1371600"/>
-          </a:xfrm>
-          <a:prstGeom prst="roundRect">
-            <a:avLst>
-              <a:gd name="adj" fmla="val 10000"/>
-            </a:avLst>
-          </a:prstGeom>
-          <a:solidFill>
-            <a:srgbClr val="FAF8F5"/>
-          </a:solidFill>
-          <a:ln w="12700">
-            <a:solidFill>
-              <a:srgbClr val="E5E2DC"/>
-            </a:solidFill>
-            <a:prstDash val="solid"/>
-          </a:ln>
-        </p:spPr>
-      </p:sp>
-      <p:sp>
-        <p:nvSpPr>
-          <p:cNvPr id="6" name="Text 4"/>
-          <p:cNvSpPr/>
-          <p:nvPr/>
-        </p:nvSpPr>
-        <p:spPr>
-          <a:xfrm>
-            <a:off x="731520" y="1188720"/>
-            <a:ext cx="7680960" cy="1371600"/>
-          </a:xfrm>
-          <a:prstGeom prst="rect">
-            <a:avLst/>
-          </a:prstGeom>
-          <a:noFill/>
-          <a:ln/>
-        </p:spPr>
-        <p:txBody>
-          <a:bodyPr wrap="square" rtlCol="0" anchor="ctr"/>
-          <a:lstStyle/>
-          <a:p>
-            <a:pPr indent="0" marL="0">
-              <a:buNone/>
-            </a:pPr>
-            <a:r>
-              <a:rPr lang="en-US" sz="1800" b="1" dirty="0">
-                <a:solidFill>
-                  <a:srgbClr val="1B2A4A"/>
-                </a:solidFill>
-                <a:latin typeface="Georgia" pitchFamily="34" charset="0"/>
-                <a:ea typeface="Georgia" pitchFamily="34" charset="-122"/>
-                <a:cs typeface="Georgia" pitchFamily="34" charset="-120"/>
-              </a:rPr>
-              <a:t>❓  Expand: 4(2x + 3)</a:t>
-            </a:r>
-            <a:endParaRPr lang="en-US" sz="1800" dirty="0"/>
-          </a:p>
-        </p:txBody>
-      </p:sp>
-      <p:sp>
-        <p:nvSpPr>
-          <p:cNvPr id="7" name="Shape 5"/>
-          <p:cNvSpPr/>
-          <p:nvPr/>
-        </p:nvSpPr>
-        <p:spPr>
-          <a:xfrm>
-            <a:off x="457200" y="2926080"/>
-            <a:ext cx="8229600" cy="1463040"/>
-          </a:xfrm>
-          <a:prstGeom prst="roundRect">
-            <a:avLst>
-              <a:gd name="adj" fmla="val 9375"/>
-            </a:avLst>
-          </a:prstGeom>
-          <a:solidFill>
-            <a:srgbClr val="E8F5F3"/>
-          </a:solidFill>
-          <a:ln/>
-        </p:spPr>
-      </p:sp>
-      <p:sp>
-        <p:nvSpPr>
-          <p:cNvPr id="8" name="Shape 6"/>
-          <p:cNvSpPr/>
-          <p:nvPr/>
-        </p:nvSpPr>
-        <p:spPr>
-          <a:xfrm>
-            <a:off x="457200" y="2926080"/>
-            <a:ext cx="54864" cy="1463040"/>
-          </a:xfrm>
-          <a:prstGeom prst="rect">
-            <a:avLst/>
-          </a:prstGeom>
-          <a:solidFill>
-            <a:srgbClr val="C8372D"/>
-          </a:solidFill>
-          <a:ln/>
-        </p:spPr>
-      </p:sp>
-      <p:sp>
-        <p:nvSpPr>
-          <p:cNvPr id="9" name="Text 7"/>
-          <p:cNvSpPr/>
-          <p:nvPr/>
-        </p:nvSpPr>
-        <p:spPr>
-          <a:xfrm>
-            <a:off x="731520" y="2926080"/>
-            <a:ext cx="7680960" cy="1463040"/>
-          </a:xfrm>
-          <a:prstGeom prst="rect">
-            <a:avLst/>
-          </a:prstGeom>
-          <a:noFill/>
-          <a:ln/>
-        </p:spPr>
-        <p:txBody>
-          <a:bodyPr wrap="square" rtlCol="0" anchor="ctr"/>
-          <a:lstStyle/>
-          <a:p>
-            <a:pPr indent="0" marL="0">
-              <a:lnSpc>
-                <a:spcPct val="140000"/>
-              </a:lnSpc>
-              <a:buNone/>
-            </a:pPr>
-            <a:r>
-              <a:rPr lang="en-US" sz="1600" dirty="0">
-                <a:solidFill>
-                  <a:srgbClr val="3D3A36"/>
-                </a:solidFill>
-                <a:latin typeface="Calibri" pitchFamily="34" charset="0"/>
-                <a:ea typeface="Calibri" pitchFamily="34" charset="-122"/>
-                <a:cs typeface="Calibri" pitchFamily="34" charset="-120"/>
-              </a:rPr>
-              <a:t>8x + 12 — multiply each term inside by 4.</a:t>
-            </a:r>
-            <a:endParaRPr lang="en-US" sz="1600" dirty="0"/>
-          </a:p>
-        </p:txBody>
-      </p:sp>
-      <p:sp>
-        <p:nvSpPr>
-          <p:cNvPr id="10" name="Text 8"/>
-          <p:cNvSpPr/>
-          <p:nvPr/>
-        </p:nvSpPr>
-        <p:spPr>
-          <a:xfrm>
-            <a:off x="7315200" y="4754880"/>
-            <a:ext cx="1828800" cy="274320"/>
-          </a:xfrm>
-          <a:prstGeom prst="rect">
-            <a:avLst/>
-          </a:prstGeom>
-          <a:noFill/>
-          <a:ln/>
-        </p:spPr>
-        <p:txBody>
-          <a:bodyPr wrap="square" rtlCol="0" anchor="ctr"/>
-          <a:lstStyle/>
-          <a:p>
-            <a:pPr algn="r" indent="0" marL="0">
-              <a:buNone/>
-            </a:pPr>
-            <a:r>
-              <a:rPr lang="en-US" sz="900" dirty="0">
-                <a:solidFill>
-                  <a:srgbClr val="9B9690"/>
-                </a:solidFill>
-                <a:latin typeface="Calibri" pitchFamily="34" charset="0"/>
-                <a:ea typeface="Calibri" pitchFamily="34" charset="-122"/>
-                <a:cs typeface="Calibri" pitchFamily="34" charset="-120"/>
-              </a:rPr>
-              <a:t>mrzocchi.com</a:t>
-            </a:r>
-            <a:endParaRPr lang="en-US" sz="900" dirty="0"/>
-          </a:p>
-        </p:txBody>
-      </p:sp>
+      <p:graphicFrame>
+        <p:nvGraphicFramePr>
+          <p:cNvPr id="10" name="Table 0"/>
+          <p:cNvGraphicFramePr>
+            <a:graphicFrameLocks noGrp="1"/>
+          </p:cNvGraphicFramePr>
+          <p:nvPr>
+            <p:extLst>
+              <p:ext uri="{D42A27DB-BD31-4B8C-83A1-F6EECF244321}">
+                <p14:modId xmlns:p14="http://schemas.microsoft.com/office/powerpoint/2010/main" val="1579011935"/>
+              </p:ext>
+            </p:extLst>
+          </p:nvPr>
+        </p:nvGraphicFramePr>
+        <p:xfrm>
+          <a:off x="640080" y="1051560"/>
+          <a:ext cx="7863840" cy="914400"/>
+        </p:xfrm>
+        <a:graphic>
+          <a:graphicData uri="http://schemas.openxmlformats.org/drawingml/2006/table">
+            <a:tbl>
+              <a:tblPr/>
+              <a:tblGrid>
+                <a:gridCol w="2621280"/>
+                <a:gridCol w="2621280"/>
+                <a:gridCol w="2621280"/>
+              </a:tblGrid>
+              <a:tr h="502920">
+                <a:tc>
+                  <a:txBody>
+                    <a:bodyPr/>
+                    <a:lstStyle/>
+                    <a:p>
+                      <a:pPr indent="0" marL="0">
+                        <a:buNone/>
+                      </a:pPr>
+                      <a:r>
+                        <a:rPr lang="en-US" sz="1300" b="1" dirty="0">
+                          <a:solidFill>
+                            <a:srgbClr val="FFFFFF"/>
+                          </a:solidFill>
+                          <a:latin typeface="Calibri" pitchFamily="34" charset="0"/>
+                          <a:ea typeface="Calibri" pitchFamily="34" charset="-122"/>
+                          <a:cs typeface="Calibri" pitchFamily="34" charset="-120"/>
+                        </a:rPr>
+                        <a:t>Topic</a:t>
+                      </a:r>
+                      <a:endParaRPr lang="en-US" sz="1300" dirty="0">
+                        <a:latin typeface="Calibri" charset="0"/>
+                        <a:ea typeface="Calibri" charset="0"/>
+                        <a:cs typeface="Calibri" charset="0"/>
+                      </a:endParaRPr>
+                    </a:p>
+                  </a:txBody>
+                  <a:tcPr marL="91440" marR="91440" marT="45720" marB="45720">
+                    <a:lnL w="6350" cap="flat" cmpd="sng" algn="ctr">
+                      <a:solidFill>
+                        <a:srgbClr val="E5E2DC"/>
+                      </a:solidFill>
+                      <a:prstDash val="solid"/>
+                      <a:round/>
+                      <a:headEnd type="none" w="med" len="med"/>
+                      <a:tailEnd type="none" w="med" len="med"/>
+                    </a:lnL>
+                    <a:lnR w="6350" cap="flat" cmpd="sng" algn="ctr">
+                      <a:solidFill>
+                        <a:srgbClr val="E5E2DC"/>
+                      </a:solidFill>
+                      <a:prstDash val="solid"/>
+                      <a:round/>
+                      <a:headEnd type="none" w="med" len="med"/>
+                      <a:tailEnd type="none" w="med" len="med"/>
+                    </a:lnR>
+                    <a:lnT w="6350" cap="flat" cmpd="sng" algn="ctr">
+                      <a:solidFill>
+                        <a:srgbClr val="E5E2DC"/>
+                      </a:solidFill>
+                      <a:prstDash val="solid"/>
+                      <a:round/>
+                      <a:headEnd type="none" w="med" len="med"/>
+                      <a:tailEnd type="none" w="med" len="med"/>
+                    </a:lnT>
+                    <a:lnB w="6350" cap="flat" cmpd="sng" algn="ctr">
+                      <a:solidFill>
+                        <a:srgbClr val="E5E2DC"/>
+                      </a:solidFill>
+                      <a:prstDash val="solid"/>
+                      <a:round/>
+                      <a:headEnd type="none" w="med" len="med"/>
+                      <a:tailEnd type="none" w="med" len="med"/>
+                    </a:lnB>
+                    <a:solidFill>
+                      <a:srgbClr val="C8372D"/>
+                    </a:solidFill>
+                  </a:tcPr>
+                </a:tc>
+                <a:tc>
+                  <a:txBody>
+                    <a:bodyPr/>
+                    <a:lstStyle/>
+                    <a:p>
+                      <a:pPr indent="0" marL="0">
+                        <a:buNone/>
+                      </a:pPr>
+                      <a:r>
+                        <a:rPr lang="en-US" sz="1300" b="1" dirty="0">
+                          <a:solidFill>
+                            <a:srgbClr val="FFFFFF"/>
+                          </a:solidFill>
+                          <a:latin typeface="Calibri" pitchFamily="34" charset="0"/>
+                          <a:ea typeface="Calibri" pitchFamily="34" charset="-122"/>
+                          <a:cs typeface="Calibri" pitchFamily="34" charset="-120"/>
+                        </a:rPr>
+                        <a:t>Formula</a:t>
+                      </a:r>
+                      <a:endParaRPr lang="en-US" sz="1300" dirty="0">
+                        <a:latin typeface="Calibri" charset="0"/>
+                        <a:ea typeface="Calibri" charset="0"/>
+                        <a:cs typeface="Calibri" charset="0"/>
+                      </a:endParaRPr>
+                    </a:p>
+                  </a:txBody>
+                  <a:tcPr marL="91440" marR="91440" marT="45720" marB="45720">
+                    <a:lnL w="6350" cap="flat" cmpd="sng" algn="ctr">
+                      <a:solidFill>
+                        <a:srgbClr val="E5E2DC"/>
+                      </a:solidFill>
+                      <a:prstDash val="solid"/>
+                      <a:round/>
+                      <a:headEnd type="none" w="med" len="med"/>
+                      <a:tailEnd type="none" w="med" len="med"/>
+                    </a:lnL>
+                    <a:lnR w="6350" cap="flat" cmpd="sng" algn="ctr">
+                      <a:solidFill>
+                        <a:srgbClr val="E5E2DC"/>
+                      </a:solidFill>
+                      <a:prstDash val="solid"/>
+                      <a:round/>
+                      <a:headEnd type="none" w="med" len="med"/>
+                      <a:tailEnd type="none" w="med" len="med"/>
+                    </a:lnR>
+                    <a:lnT w="6350" cap="flat" cmpd="sng" algn="ctr">
+                      <a:solidFill>
+                        <a:srgbClr val="E5E2DC"/>
+                      </a:solidFill>
+                      <a:prstDash val="solid"/>
+                      <a:round/>
+                      <a:headEnd type="none" w="med" len="med"/>
+                      <a:tailEnd type="none" w="med" len="med"/>
+                    </a:lnT>
+                    <a:lnB w="6350" cap="flat" cmpd="sng" algn="ctr">
+                      <a:solidFill>
+                        <a:srgbClr val="E5E2DC"/>
+                      </a:solidFill>
+                      <a:prstDash val="solid"/>
+                      <a:round/>
+                      <a:headEnd type="none" w="med" len="med"/>
+                      <a:tailEnd type="none" w="med" len="med"/>
+                    </a:lnB>
+                    <a:solidFill>
+                      <a:srgbClr val="C8372D"/>
+                    </a:solidFill>
+                  </a:tcPr>
+                </a:tc>
+                <a:tc>
+                  <a:txBody>
+                    <a:bodyPr/>
+                    <a:lstStyle/>
+                    <a:p>
+                      <a:pPr indent="0" marL="0">
+                        <a:buNone/>
+                      </a:pPr>
+                      <a:r>
+                        <a:rPr lang="en-US" sz="1300" b="1" dirty="0">
+                          <a:solidFill>
+                            <a:srgbClr val="FFFFFF"/>
+                          </a:solidFill>
+                          <a:latin typeface="Calibri" pitchFamily="34" charset="0"/>
+                          <a:ea typeface="Calibri" pitchFamily="34" charset="-122"/>
+                          <a:cs typeface="Calibri" pitchFamily="34" charset="-120"/>
+                        </a:rPr>
+                        <a:t>Key Idea</a:t>
+                      </a:r>
+                      <a:endParaRPr lang="en-US" sz="1300" dirty="0">
+                        <a:latin typeface="Calibri" charset="0"/>
+                        <a:ea typeface="Calibri" charset="0"/>
+                        <a:cs typeface="Calibri" charset="0"/>
+                      </a:endParaRPr>
+                    </a:p>
+                  </a:txBody>
+                  <a:tcPr marL="91440" marR="91440" marT="45720" marB="45720">
+                    <a:lnL w="6350" cap="flat" cmpd="sng" algn="ctr">
+                      <a:solidFill>
+                        <a:srgbClr val="E5E2DC"/>
+                      </a:solidFill>
+                      <a:prstDash val="solid"/>
+                      <a:round/>
+                      <a:headEnd type="none" w="med" len="med"/>
+                      <a:tailEnd type="none" w="med" len="med"/>
+                    </a:lnL>
+                    <a:lnR w="6350" cap="flat" cmpd="sng" algn="ctr">
+                      <a:solidFill>
+                        <a:srgbClr val="E5E2DC"/>
+                      </a:solidFill>
+                      <a:prstDash val="solid"/>
+                      <a:round/>
+                      <a:headEnd type="none" w="med" len="med"/>
+                      <a:tailEnd type="none" w="med" len="med"/>
+                    </a:lnR>
+                    <a:lnT w="6350" cap="flat" cmpd="sng" algn="ctr">
+                      <a:solidFill>
+                        <a:srgbClr val="E5E2DC"/>
+                      </a:solidFill>
+                      <a:prstDash val="solid"/>
+                      <a:round/>
+                      <a:headEnd type="none" w="med" len="med"/>
+                      <a:tailEnd type="none" w="med" len="med"/>
+                    </a:lnT>
+                    <a:lnB w="6350" cap="flat" cmpd="sng" algn="ctr">
+                      <a:solidFill>
+                        <a:srgbClr val="E5E2DC"/>
+                      </a:solidFill>
+                      <a:prstDash val="solid"/>
+                      <a:round/>
+                      <a:headEnd type="none" w="med" len="med"/>
+                      <a:tailEnd type="none" w="med" len="med"/>
+                    </a:lnB>
+                    <a:solidFill>
+                      <a:srgbClr val="C8372D"/>
+                    </a:solidFill>
+                  </a:tcPr>
+                </a:tc>
+              </a:tr>
+              <a:tr h="502920">
+                <a:tc>
+                  <a:txBody>
+                    <a:bodyPr/>
+                    <a:lstStyle/>
+                    <a:p>
+                      <a:pPr indent="0" marL="0">
+                        <a:buNone/>
+                      </a:pPr>
+                      <a:r>
+                        <a:rPr lang="en-US" sz="1300" dirty="0">
+                          <a:solidFill>
+                            <a:srgbClr val="3D3A36"/>
+                          </a:solidFill>
+                          <a:latin typeface="Calibri" pitchFamily="34" charset="0"/>
+                          <a:ea typeface="Calibri" pitchFamily="34" charset="-122"/>
+                          <a:cs typeface="Calibri" pitchFamily="34" charset="-120"/>
+                        </a:rPr>
+                        <a:t>nth term</a:t>
+                      </a:r>
+                      <a:endParaRPr lang="en-US" sz="1300" dirty="0">
+                        <a:latin typeface="Calibri" charset="0"/>
+                        <a:ea typeface="Calibri" charset="0"/>
+                        <a:cs typeface="Calibri" charset="0"/>
+                      </a:endParaRPr>
+                    </a:p>
+                  </a:txBody>
+                  <a:tcPr marL="91440" marR="91440" marT="45720" marB="45720">
+                    <a:lnL w="6350" cap="flat" cmpd="sng" algn="ctr">
+                      <a:solidFill>
+                        <a:srgbClr val="E5E2DC"/>
+                      </a:solidFill>
+                      <a:prstDash val="solid"/>
+                      <a:round/>
+                      <a:headEnd type="none" w="med" len="med"/>
+                      <a:tailEnd type="none" w="med" len="med"/>
+                    </a:lnL>
+                    <a:lnR w="6350" cap="flat" cmpd="sng" algn="ctr">
+                      <a:solidFill>
+                        <a:srgbClr val="E5E2DC"/>
+                      </a:solidFill>
+                      <a:prstDash val="solid"/>
+                      <a:round/>
+                      <a:headEnd type="none" w="med" len="med"/>
+                      <a:tailEnd type="none" w="med" len="med"/>
+                    </a:lnR>
+                    <a:lnT w="6350" cap="flat" cmpd="sng" algn="ctr">
+                      <a:solidFill>
+                        <a:srgbClr val="E5E2DC"/>
+                      </a:solidFill>
+                      <a:prstDash val="solid"/>
+                      <a:round/>
+                      <a:headEnd type="none" w="med" len="med"/>
+                      <a:tailEnd type="none" w="med" len="med"/>
+                    </a:lnT>
+                    <a:lnB w="6350" cap="flat" cmpd="sng" algn="ctr">
+                      <a:solidFill>
+                        <a:srgbClr val="E5E2DC"/>
+                      </a:solidFill>
+                      <a:prstDash val="solid"/>
+                      <a:round/>
+                      <a:headEnd type="none" w="med" len="med"/>
+                      <a:tailEnd type="none" w="med" len="med"/>
+                    </a:lnB>
+                  </a:tcPr>
+                </a:tc>
+                <a:tc>
+                  <a:txBody>
+                    <a:bodyPr/>
+                    <a:lstStyle/>
+                    <a:p>
+                      <a:pPr indent="0" marL="0">
+                        <a:buNone/>
+                      </a:pPr>
+                      <a:r>
+                        <a:rPr lang="en-US" sz="1300" dirty="0">
+                          <a:solidFill>
+                            <a:srgbClr val="3D3A36"/>
+                          </a:solidFill>
+                          <a:latin typeface="Calibri" pitchFamily="34" charset="0"/>
+                          <a:ea typeface="Calibri" pitchFamily="34" charset="-122"/>
+                          <a:cs typeface="Calibri" pitchFamily="34" charset="-120"/>
+                        </a:rPr>
+                        <a:t>T = dn + c</a:t>
+                      </a:r>
+                      <a:endParaRPr lang="en-US" sz="1300" dirty="0">
+                        <a:latin typeface="Calibri" charset="0"/>
+                        <a:ea typeface="Calibri" charset="0"/>
+                        <a:cs typeface="Calibri" charset="0"/>
+                      </a:endParaRPr>
+                    </a:p>
+                  </a:txBody>
+                  <a:tcPr marL="91440" marR="91440" marT="45720" marB="45720">
+                    <a:lnL w="6350" cap="flat" cmpd="sng" algn="ctr">
+                      <a:solidFill>
+                        <a:srgbClr val="E5E2DC"/>
+                      </a:solidFill>
+                      <a:prstDash val="solid"/>
+                      <a:round/>
+                      <a:headEnd type="none" w="med" len="med"/>
+                      <a:tailEnd type="none" w="med" len="med"/>
+                    </a:lnL>
+                    <a:lnR w="6350" cap="flat" cmpd="sng" algn="ctr">
+                      <a:solidFill>
+                        <a:srgbClr val="E5E2DC"/>
+                      </a:solidFill>
+                      <a:prstDash val="solid"/>
+                      <a:round/>
+                      <a:headEnd type="none" w="med" len="med"/>
+                      <a:tailEnd type="none" w="med" len="med"/>
+                    </a:lnR>
+                    <a:lnT w="6350" cap="flat" cmpd="sng" algn="ctr">
+                      <a:solidFill>
+                        <a:srgbClr val="E5E2DC"/>
+                      </a:solidFill>
+                      <a:prstDash val="solid"/>
+                      <a:round/>
+                      <a:headEnd type="none" w="med" len="med"/>
+                      <a:tailEnd type="none" w="med" len="med"/>
+                    </a:lnT>
+                    <a:lnB w="6350" cap="flat" cmpd="sng" algn="ctr">
+                      <a:solidFill>
+                        <a:srgbClr val="E5E2DC"/>
+                      </a:solidFill>
+                      <a:prstDash val="solid"/>
+                      <a:round/>
+                      <a:headEnd type="none" w="med" len="med"/>
+                      <a:tailEnd type="none" w="med" len="med"/>
+                    </a:lnB>
+                  </a:tcPr>
+                </a:tc>
+                <a:tc>
+                  <a:txBody>
+                    <a:bodyPr/>
+                    <a:lstStyle/>
+                    <a:p>
+                      <a:pPr indent="0" marL="0">
+                        <a:buNone/>
+                      </a:pPr>
+                      <a:r>
+                        <a:rPr lang="en-US" sz="1300" dirty="0">
+                          <a:solidFill>
+                            <a:srgbClr val="3D3A36"/>
+                          </a:solidFill>
+                          <a:latin typeface="Calibri" pitchFamily="34" charset="0"/>
+                          <a:ea typeface="Calibri" pitchFamily="34" charset="-122"/>
+                          <a:cs typeface="Calibri" pitchFamily="34" charset="-120"/>
+                        </a:rPr>
+                        <a:t>d = common difference, c = adjustment</a:t>
+                      </a:r>
+                      <a:endParaRPr lang="en-US" sz="1300" dirty="0">
+                        <a:latin typeface="Calibri" charset="0"/>
+                        <a:ea typeface="Calibri" charset="0"/>
+                        <a:cs typeface="Calibri" charset="0"/>
+                      </a:endParaRPr>
+                    </a:p>
+                  </a:txBody>
+                  <a:tcPr marL="91440" marR="91440" marT="45720" marB="45720">
+                    <a:lnL w="6350" cap="flat" cmpd="sng" algn="ctr">
+                      <a:solidFill>
+                        <a:srgbClr val="E5E2DC"/>
+                      </a:solidFill>
+                      <a:prstDash val="solid"/>
+                      <a:round/>
+                      <a:headEnd type="none" w="med" len="med"/>
+                      <a:tailEnd type="none" w="med" len="med"/>
+                    </a:lnL>
+                    <a:lnR w="6350" cap="flat" cmpd="sng" algn="ctr">
+                      <a:solidFill>
+                        <a:srgbClr val="E5E2DC"/>
+                      </a:solidFill>
+                      <a:prstDash val="solid"/>
+                      <a:round/>
+                      <a:headEnd type="none" w="med" len="med"/>
+                      <a:tailEnd type="none" w="med" len="med"/>
+                    </a:lnR>
+                    <a:lnT w="6350" cap="flat" cmpd="sng" algn="ctr">
+                      <a:solidFill>
+                        <a:srgbClr val="E5E2DC"/>
+                      </a:solidFill>
+                      <a:prstDash val="solid"/>
+                      <a:round/>
+                      <a:headEnd type="none" w="med" len="med"/>
+                      <a:tailEnd type="none" w="med" len="med"/>
+                    </a:lnT>
+                    <a:lnB w="6350" cap="flat" cmpd="sng" algn="ctr">
+                      <a:solidFill>
+                        <a:srgbClr val="E5E2DC"/>
+                      </a:solidFill>
+                      <a:prstDash val="solid"/>
+                      <a:round/>
+                      <a:headEnd type="none" w="med" len="med"/>
+                      <a:tailEnd type="none" w="med" len="med"/>
+                    </a:lnB>
+                  </a:tcPr>
+                </a:tc>
+              </a:tr>
+              <a:tr h="502920">
+                <a:tc>
+                  <a:txBody>
+                    <a:bodyPr/>
+                    <a:lstStyle/>
+                    <a:p>
+                      <a:pPr indent="0" marL="0">
+                        <a:buNone/>
+                      </a:pPr>
+                      <a:r>
+                        <a:rPr lang="en-US" sz="1300" dirty="0">
+                          <a:solidFill>
+                            <a:srgbClr val="3D3A36"/>
+                          </a:solidFill>
+                          <a:latin typeface="Calibri" pitchFamily="34" charset="0"/>
+                          <a:ea typeface="Calibri" pitchFamily="34" charset="-122"/>
+                          <a:cs typeface="Calibri" pitchFamily="34" charset="-120"/>
+                        </a:rPr>
+                        <a:t>Gradient</a:t>
+                      </a:r>
+                      <a:endParaRPr lang="en-US" sz="1300" dirty="0">
+                        <a:latin typeface="Calibri" charset="0"/>
+                        <a:ea typeface="Calibri" charset="0"/>
+                        <a:cs typeface="Calibri" charset="0"/>
+                      </a:endParaRPr>
+                    </a:p>
+                  </a:txBody>
+                  <a:tcPr marL="91440" marR="91440" marT="45720" marB="45720">
+                    <a:lnL w="6350" cap="flat" cmpd="sng" algn="ctr">
+                      <a:solidFill>
+                        <a:srgbClr val="E5E2DC"/>
+                      </a:solidFill>
+                      <a:prstDash val="solid"/>
+                      <a:round/>
+                      <a:headEnd type="none" w="med" len="med"/>
+                      <a:tailEnd type="none" w="med" len="med"/>
+                    </a:lnL>
+                    <a:lnR w="6350" cap="flat" cmpd="sng" algn="ctr">
+                      <a:solidFill>
+                        <a:srgbClr val="E5E2DC"/>
+                      </a:solidFill>
+                      <a:prstDash val="solid"/>
+                      <a:round/>
+                      <a:headEnd type="none" w="med" len="med"/>
+                      <a:tailEnd type="none" w="med" len="med"/>
+                    </a:lnR>
+                    <a:lnT w="6350" cap="flat" cmpd="sng" algn="ctr">
+                      <a:solidFill>
+                        <a:srgbClr val="E5E2DC"/>
+                      </a:solidFill>
+                      <a:prstDash val="solid"/>
+                      <a:round/>
+                      <a:headEnd type="none" w="med" len="med"/>
+                      <a:tailEnd type="none" w="med" len="med"/>
+                    </a:lnT>
+                    <a:lnB w="6350" cap="flat" cmpd="sng" algn="ctr">
+                      <a:solidFill>
+                        <a:srgbClr val="E5E2DC"/>
+                      </a:solidFill>
+                      <a:prstDash val="solid"/>
+                      <a:round/>
+                      <a:headEnd type="none" w="med" len="med"/>
+                      <a:tailEnd type="none" w="med" len="med"/>
+                    </a:lnB>
+                  </a:tcPr>
+                </a:tc>
+                <a:tc>
+                  <a:txBody>
+                    <a:bodyPr/>
+                    <a:lstStyle/>
+                    <a:p>
+                      <a:pPr indent="0" marL="0">
+                        <a:buNone/>
+                      </a:pPr>
+                      <a:r>
+                        <a:rPr lang="en-US" sz="1300" dirty="0">
+                          <a:solidFill>
+                            <a:srgbClr val="3D3A36"/>
+                          </a:solidFill>
+                          <a:latin typeface="Calibri" pitchFamily="34" charset="0"/>
+                          <a:ea typeface="Calibri" pitchFamily="34" charset="-122"/>
+                          <a:cs typeface="Calibri" pitchFamily="34" charset="-120"/>
+                        </a:rPr>
+                        <a:t>m = rise / run</a:t>
+                      </a:r>
+                      <a:endParaRPr lang="en-US" sz="1300" dirty="0">
+                        <a:latin typeface="Calibri" charset="0"/>
+                        <a:ea typeface="Calibri" charset="0"/>
+                        <a:cs typeface="Calibri" charset="0"/>
+                      </a:endParaRPr>
+                    </a:p>
+                  </a:txBody>
+                  <a:tcPr marL="91440" marR="91440" marT="45720" marB="45720">
+                    <a:lnL w="6350" cap="flat" cmpd="sng" algn="ctr">
+                      <a:solidFill>
+                        <a:srgbClr val="E5E2DC"/>
+                      </a:solidFill>
+                      <a:prstDash val="solid"/>
+                      <a:round/>
+                      <a:headEnd type="none" w="med" len="med"/>
+                      <a:tailEnd type="none" w="med" len="med"/>
+                    </a:lnL>
+                    <a:lnR w="6350" cap="flat" cmpd="sng" algn="ctr">
+                      <a:solidFill>
+                        <a:srgbClr val="E5E2DC"/>
+                      </a:solidFill>
+                      <a:prstDash val="solid"/>
+                      <a:round/>
+                      <a:headEnd type="none" w="med" len="med"/>
+                      <a:tailEnd type="none" w="med" len="med"/>
+                    </a:lnR>
+                    <a:lnT w="6350" cap="flat" cmpd="sng" algn="ctr">
+                      <a:solidFill>
+                        <a:srgbClr val="E5E2DC"/>
+                      </a:solidFill>
+                      <a:prstDash val="solid"/>
+                      <a:round/>
+                      <a:headEnd type="none" w="med" len="med"/>
+                      <a:tailEnd type="none" w="med" len="med"/>
+                    </a:lnT>
+                    <a:lnB w="6350" cap="flat" cmpd="sng" algn="ctr">
+                      <a:solidFill>
+                        <a:srgbClr val="E5E2DC"/>
+                      </a:solidFill>
+                      <a:prstDash val="solid"/>
+                      <a:round/>
+                      <a:headEnd type="none" w="med" len="med"/>
+                      <a:tailEnd type="none" w="med" len="med"/>
+                    </a:lnB>
+                  </a:tcPr>
+                </a:tc>
+                <a:tc>
+                  <a:txBody>
+                    <a:bodyPr/>
+                    <a:lstStyle/>
+                    <a:p>
+                      <a:pPr indent="0" marL="0">
+                        <a:buNone/>
+                      </a:pPr>
+                      <a:r>
+                        <a:rPr lang="en-US" sz="1300" dirty="0">
+                          <a:solidFill>
+                            <a:srgbClr val="3D3A36"/>
+                          </a:solidFill>
+                          <a:latin typeface="Calibri" pitchFamily="34" charset="0"/>
+                          <a:ea typeface="Calibri" pitchFamily="34" charset="-122"/>
+                          <a:cs typeface="Calibri" pitchFamily="34" charset="-120"/>
+                        </a:rPr>
+                        <a:t>Steepness of the line</a:t>
+                      </a:r>
+                      <a:endParaRPr lang="en-US" sz="1300" dirty="0">
+                        <a:latin typeface="Calibri" charset="0"/>
+                        <a:ea typeface="Calibri" charset="0"/>
+                        <a:cs typeface="Calibri" charset="0"/>
+                      </a:endParaRPr>
+                    </a:p>
+                  </a:txBody>
+                  <a:tcPr marL="91440" marR="91440" marT="45720" marB="45720">
+                    <a:lnL w="6350" cap="flat" cmpd="sng" algn="ctr">
+                      <a:solidFill>
+                        <a:srgbClr val="E5E2DC"/>
+                      </a:solidFill>
+                      <a:prstDash val="solid"/>
+                      <a:round/>
+                      <a:headEnd type="none" w="med" len="med"/>
+                      <a:tailEnd type="none" w="med" len="med"/>
+                    </a:lnL>
+                    <a:lnR w="6350" cap="flat" cmpd="sng" algn="ctr">
+                      <a:solidFill>
+                        <a:srgbClr val="E5E2DC"/>
+                      </a:solidFill>
+                      <a:prstDash val="solid"/>
+                      <a:round/>
+                      <a:headEnd type="none" w="med" len="med"/>
+                      <a:tailEnd type="none" w="med" len="med"/>
+                    </a:lnR>
+                    <a:lnT w="6350" cap="flat" cmpd="sng" algn="ctr">
+                      <a:solidFill>
+                        <a:srgbClr val="E5E2DC"/>
+                      </a:solidFill>
+                      <a:prstDash val="solid"/>
+                      <a:round/>
+                      <a:headEnd type="none" w="med" len="med"/>
+                      <a:tailEnd type="none" w="med" len="med"/>
+                    </a:lnT>
+                    <a:lnB w="6350" cap="flat" cmpd="sng" algn="ctr">
+                      <a:solidFill>
+                        <a:srgbClr val="E5E2DC"/>
+                      </a:solidFill>
+                      <a:prstDash val="solid"/>
+                      <a:round/>
+                      <a:headEnd type="none" w="med" len="med"/>
+                      <a:tailEnd type="none" w="med" len="med"/>
+                    </a:lnB>
+                  </a:tcPr>
+                </a:tc>
+              </a:tr>
+              <a:tr h="502920">
+                <a:tc>
+                  <a:txBody>
+                    <a:bodyPr/>
+                    <a:lstStyle/>
+                    <a:p>
+                      <a:pPr indent="0" marL="0">
+                        <a:buNone/>
+                      </a:pPr>
+                      <a:r>
+                        <a:rPr lang="en-US" sz="1300" dirty="0">
+                          <a:solidFill>
+                            <a:srgbClr val="3D3A36"/>
+                          </a:solidFill>
+                          <a:latin typeface="Calibri" pitchFamily="34" charset="0"/>
+                          <a:ea typeface="Calibri" pitchFamily="34" charset="-122"/>
+                          <a:cs typeface="Calibri" pitchFamily="34" charset="-120"/>
+                        </a:rPr>
+                        <a:t>y = mx + c</a:t>
+                      </a:r>
+                      <a:endParaRPr lang="en-US" sz="1300" dirty="0">
+                        <a:latin typeface="Calibri" charset="0"/>
+                        <a:ea typeface="Calibri" charset="0"/>
+                        <a:cs typeface="Calibri" charset="0"/>
+                      </a:endParaRPr>
+                    </a:p>
+                  </a:txBody>
+                  <a:tcPr marL="91440" marR="91440" marT="45720" marB="45720">
+                    <a:lnL w="6350" cap="flat" cmpd="sng" algn="ctr">
+                      <a:solidFill>
+                        <a:srgbClr val="E5E2DC"/>
+                      </a:solidFill>
+                      <a:prstDash val="solid"/>
+                      <a:round/>
+                      <a:headEnd type="none" w="med" len="med"/>
+                      <a:tailEnd type="none" w="med" len="med"/>
+                    </a:lnL>
+                    <a:lnR w="6350" cap="flat" cmpd="sng" algn="ctr">
+                      <a:solidFill>
+                        <a:srgbClr val="E5E2DC"/>
+                      </a:solidFill>
+                      <a:prstDash val="solid"/>
+                      <a:round/>
+                      <a:headEnd type="none" w="med" len="med"/>
+                      <a:tailEnd type="none" w="med" len="med"/>
+                    </a:lnR>
+                    <a:lnT w="6350" cap="flat" cmpd="sng" algn="ctr">
+                      <a:solidFill>
+                        <a:srgbClr val="E5E2DC"/>
+                      </a:solidFill>
+                      <a:prstDash val="solid"/>
+                      <a:round/>
+                      <a:headEnd type="none" w="med" len="med"/>
+                      <a:tailEnd type="none" w="med" len="med"/>
+                    </a:lnT>
+                    <a:lnB w="6350" cap="flat" cmpd="sng" algn="ctr">
+                      <a:solidFill>
+                        <a:srgbClr val="E5E2DC"/>
+                      </a:solidFill>
+                      <a:prstDash val="solid"/>
+                      <a:round/>
+                      <a:headEnd type="none" w="med" len="med"/>
+                      <a:tailEnd type="none" w="med" len="med"/>
+                    </a:lnB>
+                  </a:tcPr>
+                </a:tc>
+                <a:tc>
+                  <a:txBody>
+                    <a:bodyPr/>
+                    <a:lstStyle/>
+                    <a:p>
+                      <a:pPr indent="0" marL="0">
+                        <a:buNone/>
+                      </a:pPr>
+                      <a:r>
+                        <a:rPr lang="en-US" sz="1300" dirty="0">
+                          <a:solidFill>
+                            <a:srgbClr val="3D3A36"/>
+                          </a:solidFill>
+                          <a:latin typeface="Calibri" pitchFamily="34" charset="0"/>
+                          <a:ea typeface="Calibri" pitchFamily="34" charset="-122"/>
+                          <a:cs typeface="Calibri" pitchFamily="34" charset="-120"/>
+                        </a:rPr>
+                        <a:t>y = mx + c</a:t>
+                      </a:r>
+                      <a:endParaRPr lang="en-US" sz="1300" dirty="0">
+                        <a:latin typeface="Calibri" charset="0"/>
+                        <a:ea typeface="Calibri" charset="0"/>
+                        <a:cs typeface="Calibri" charset="0"/>
+                      </a:endParaRPr>
+                    </a:p>
+                  </a:txBody>
+                  <a:tcPr marL="91440" marR="91440" marT="45720" marB="45720">
+                    <a:lnL w="6350" cap="flat" cmpd="sng" algn="ctr">
+                      <a:solidFill>
+                        <a:srgbClr val="E5E2DC"/>
+                      </a:solidFill>
+                      <a:prstDash val="solid"/>
+                      <a:round/>
+                      <a:headEnd type="none" w="med" len="med"/>
+                      <a:tailEnd type="none" w="med" len="med"/>
+                    </a:lnL>
+                    <a:lnR w="6350" cap="flat" cmpd="sng" algn="ctr">
+                      <a:solidFill>
+                        <a:srgbClr val="E5E2DC"/>
+                      </a:solidFill>
+                      <a:prstDash val="solid"/>
+                      <a:round/>
+                      <a:headEnd type="none" w="med" len="med"/>
+                      <a:tailEnd type="none" w="med" len="med"/>
+                    </a:lnR>
+                    <a:lnT w="6350" cap="flat" cmpd="sng" algn="ctr">
+                      <a:solidFill>
+                        <a:srgbClr val="E5E2DC"/>
+                      </a:solidFill>
+                      <a:prstDash val="solid"/>
+                      <a:round/>
+                      <a:headEnd type="none" w="med" len="med"/>
+                      <a:tailEnd type="none" w="med" len="med"/>
+                    </a:lnT>
+                    <a:lnB w="6350" cap="flat" cmpd="sng" algn="ctr">
+                      <a:solidFill>
+                        <a:srgbClr val="E5E2DC"/>
+                      </a:solidFill>
+                      <a:prstDash val="solid"/>
+                      <a:round/>
+                      <a:headEnd type="none" w="med" len="med"/>
+                      <a:tailEnd type="none" w="med" len="med"/>
+                    </a:lnB>
+                  </a:tcPr>
+                </a:tc>
+                <a:tc>
+                  <a:txBody>
+                    <a:bodyPr/>
+                    <a:lstStyle/>
+                    <a:p>
+                      <a:pPr indent="0" marL="0">
+                        <a:buNone/>
+                      </a:pPr>
+                      <a:r>
+                        <a:rPr lang="en-US" sz="1300" dirty="0">
+                          <a:solidFill>
+                            <a:srgbClr val="3D3A36"/>
+                          </a:solidFill>
+                          <a:latin typeface="Calibri" pitchFamily="34" charset="0"/>
+                          <a:ea typeface="Calibri" pitchFamily="34" charset="-122"/>
+                          <a:cs typeface="Calibri" pitchFamily="34" charset="-120"/>
+                        </a:rPr>
+                        <a:t>m = gradient, c = y-intercept</a:t>
+                      </a:r>
+                      <a:endParaRPr lang="en-US" sz="1300" dirty="0">
+                        <a:latin typeface="Calibri" charset="0"/>
+                        <a:ea typeface="Calibri" charset="0"/>
+                        <a:cs typeface="Calibri" charset="0"/>
+                      </a:endParaRPr>
+                    </a:p>
+                  </a:txBody>
+                  <a:tcPr marL="91440" marR="91440" marT="45720" marB="45720">
+                    <a:lnL w="6350" cap="flat" cmpd="sng" algn="ctr">
+                      <a:solidFill>
+                        <a:srgbClr val="E5E2DC"/>
+                      </a:solidFill>
+                      <a:prstDash val="solid"/>
+                      <a:round/>
+                      <a:headEnd type="none" w="med" len="med"/>
+                      <a:tailEnd type="none" w="med" len="med"/>
+                    </a:lnL>
+                    <a:lnR w="6350" cap="flat" cmpd="sng" algn="ctr">
+                      <a:solidFill>
+                        <a:srgbClr val="E5E2DC"/>
+                      </a:solidFill>
+                      <a:prstDash val="solid"/>
+                      <a:round/>
+                      <a:headEnd type="none" w="med" len="med"/>
+                      <a:tailEnd type="none" w="med" len="med"/>
+                    </a:lnR>
+                    <a:lnT w="6350" cap="flat" cmpd="sng" algn="ctr">
+                      <a:solidFill>
+                        <a:srgbClr val="E5E2DC"/>
+                      </a:solidFill>
+                      <a:prstDash val="solid"/>
+                      <a:round/>
+                      <a:headEnd type="none" w="med" len="med"/>
+                      <a:tailEnd type="none" w="med" len="med"/>
+                    </a:lnT>
+                    <a:lnB w="6350" cap="flat" cmpd="sng" algn="ctr">
+                      <a:solidFill>
+                        <a:srgbClr val="E5E2DC"/>
+                      </a:solidFill>
+                      <a:prstDash val="solid"/>
+                      <a:round/>
+                      <a:headEnd type="none" w="med" len="med"/>
+                      <a:tailEnd type="none" w="med" len="med"/>
+                    </a:lnB>
+                  </a:tcPr>
+                </a:tc>
+              </a:tr>
+              <a:tr h="502920">
+                <a:tc>
+                  <a:txBody>
+                    <a:bodyPr/>
+                    <a:lstStyle/>
+                    <a:p>
+                      <a:pPr indent="0" marL="0">
+                        <a:buNone/>
+                      </a:pPr>
+                      <a:r>
+                        <a:rPr lang="en-US" sz="1300" dirty="0">
+                          <a:solidFill>
+                            <a:srgbClr val="3D3A36"/>
+                          </a:solidFill>
+                          <a:latin typeface="Calibri" pitchFamily="34" charset="0"/>
+                          <a:ea typeface="Calibri" pitchFamily="34" charset="-122"/>
+                          <a:cs typeface="Calibri" pitchFamily="34" charset="-120"/>
+                        </a:rPr>
+                        <a:t>Parallel lines</a:t>
+                      </a:r>
+                      <a:endParaRPr lang="en-US" sz="1300" dirty="0">
+                        <a:latin typeface="Calibri" charset="0"/>
+                        <a:ea typeface="Calibri" charset="0"/>
+                        <a:cs typeface="Calibri" charset="0"/>
+                      </a:endParaRPr>
+                    </a:p>
+                  </a:txBody>
+                  <a:tcPr marL="91440" marR="91440" marT="45720" marB="45720">
+                    <a:lnL w="6350" cap="flat" cmpd="sng" algn="ctr">
+                      <a:solidFill>
+                        <a:srgbClr val="E5E2DC"/>
+                      </a:solidFill>
+                      <a:prstDash val="solid"/>
+                      <a:round/>
+                      <a:headEnd type="none" w="med" len="med"/>
+                      <a:tailEnd type="none" w="med" len="med"/>
+                    </a:lnL>
+                    <a:lnR w="6350" cap="flat" cmpd="sng" algn="ctr">
+                      <a:solidFill>
+                        <a:srgbClr val="E5E2DC"/>
+                      </a:solidFill>
+                      <a:prstDash val="solid"/>
+                      <a:round/>
+                      <a:headEnd type="none" w="med" len="med"/>
+                      <a:tailEnd type="none" w="med" len="med"/>
+                    </a:lnR>
+                    <a:lnT w="6350" cap="flat" cmpd="sng" algn="ctr">
+                      <a:solidFill>
+                        <a:srgbClr val="E5E2DC"/>
+                      </a:solidFill>
+                      <a:prstDash val="solid"/>
+                      <a:round/>
+                      <a:headEnd type="none" w="med" len="med"/>
+                      <a:tailEnd type="none" w="med" len="med"/>
+                    </a:lnT>
+                    <a:lnB w="6350" cap="flat" cmpd="sng" algn="ctr">
+                      <a:solidFill>
+                        <a:srgbClr val="E5E2DC"/>
+                      </a:solidFill>
+                      <a:prstDash val="solid"/>
+                      <a:round/>
+                      <a:headEnd type="none" w="med" len="med"/>
+                      <a:tailEnd type="none" w="med" len="med"/>
+                    </a:lnB>
+                  </a:tcPr>
+                </a:tc>
+                <a:tc>
+                  <a:txBody>
+                    <a:bodyPr/>
+                    <a:lstStyle/>
+                    <a:p>
+                      <a:pPr indent="0" marL="0">
+                        <a:buNone/>
+                      </a:pPr>
+                      <a:r>
+                        <a:rPr lang="en-US" sz="1300" dirty="0">
+                          <a:solidFill>
+                            <a:srgbClr val="3D3A36"/>
+                          </a:solidFill>
+                          <a:latin typeface="Calibri" pitchFamily="34" charset="0"/>
+                          <a:ea typeface="Calibri" pitchFamily="34" charset="-122"/>
+                          <a:cs typeface="Calibri" pitchFamily="34" charset="-120"/>
+                        </a:rPr>
+                        <a:t>Same m</a:t>
+                      </a:r>
+                      <a:endParaRPr lang="en-US" sz="1300" dirty="0">
+                        <a:latin typeface="Calibri" charset="0"/>
+                        <a:ea typeface="Calibri" charset="0"/>
+                        <a:cs typeface="Calibri" charset="0"/>
+                      </a:endParaRPr>
+                    </a:p>
+                  </a:txBody>
+                  <a:tcPr marL="91440" marR="91440" marT="45720" marB="45720">
+                    <a:lnL w="6350" cap="flat" cmpd="sng" algn="ctr">
+                      <a:solidFill>
+                        <a:srgbClr val="E5E2DC"/>
+                      </a:solidFill>
+                      <a:prstDash val="solid"/>
+                      <a:round/>
+                      <a:headEnd type="none" w="med" len="med"/>
+                      <a:tailEnd type="none" w="med" len="med"/>
+                    </a:lnL>
+                    <a:lnR w="6350" cap="flat" cmpd="sng" algn="ctr">
+                      <a:solidFill>
+                        <a:srgbClr val="E5E2DC"/>
+                      </a:solidFill>
+                      <a:prstDash val="solid"/>
+                      <a:round/>
+                      <a:headEnd type="none" w="med" len="med"/>
+                      <a:tailEnd type="none" w="med" len="med"/>
+                    </a:lnR>
+                    <a:lnT w="6350" cap="flat" cmpd="sng" algn="ctr">
+                      <a:solidFill>
+                        <a:srgbClr val="E5E2DC"/>
+                      </a:solidFill>
+                      <a:prstDash val="solid"/>
+                      <a:round/>
+                      <a:headEnd type="none" w="med" len="med"/>
+                      <a:tailEnd type="none" w="med" len="med"/>
+                    </a:lnT>
+                    <a:lnB w="6350" cap="flat" cmpd="sng" algn="ctr">
+                      <a:solidFill>
+                        <a:srgbClr val="E5E2DC"/>
+                      </a:solidFill>
+                      <a:prstDash val="solid"/>
+                      <a:round/>
+                      <a:headEnd type="none" w="med" len="med"/>
+                      <a:tailEnd type="none" w="med" len="med"/>
+                    </a:lnB>
+                  </a:tcPr>
+                </a:tc>
+                <a:tc>
+                  <a:txBody>
+                    <a:bodyPr/>
+                    <a:lstStyle/>
+                    <a:p>
+                      <a:pPr indent="0" marL="0">
+                        <a:buNone/>
+                      </a:pPr>
+                      <a:r>
+                        <a:rPr lang="en-US" sz="1300" dirty="0">
+                          <a:solidFill>
+                            <a:srgbClr val="3D3A36"/>
+                          </a:solidFill>
+                          <a:latin typeface="Calibri" pitchFamily="34" charset="0"/>
+                          <a:ea typeface="Calibri" pitchFamily="34" charset="-122"/>
+                          <a:cs typeface="Calibri" pitchFamily="34" charset="-120"/>
+                        </a:rPr>
+                        <a:t>Different c values</a:t>
+                      </a:r>
+                      <a:endParaRPr lang="en-US" sz="1300" dirty="0">
+                        <a:latin typeface="Calibri" charset="0"/>
+                        <a:ea typeface="Calibri" charset="0"/>
+                        <a:cs typeface="Calibri" charset="0"/>
+                      </a:endParaRPr>
+                    </a:p>
+                  </a:txBody>
+                  <a:tcPr marL="91440" marR="91440" marT="45720" marB="45720">
+                    <a:lnL w="6350" cap="flat" cmpd="sng" algn="ctr">
+                      <a:solidFill>
+                        <a:srgbClr val="E5E2DC"/>
+                      </a:solidFill>
+                      <a:prstDash val="solid"/>
+                      <a:round/>
+                      <a:headEnd type="none" w="med" len="med"/>
+                      <a:tailEnd type="none" w="med" len="med"/>
+                    </a:lnL>
+                    <a:lnR w="6350" cap="flat" cmpd="sng" algn="ctr">
+                      <a:solidFill>
+                        <a:srgbClr val="E5E2DC"/>
+                      </a:solidFill>
+                      <a:prstDash val="solid"/>
+                      <a:round/>
+                      <a:headEnd type="none" w="med" len="med"/>
+                      <a:tailEnd type="none" w="med" len="med"/>
+                    </a:lnR>
+                    <a:lnT w="6350" cap="flat" cmpd="sng" algn="ctr">
+                      <a:solidFill>
+                        <a:srgbClr val="E5E2DC"/>
+                      </a:solidFill>
+                      <a:prstDash val="solid"/>
+                      <a:round/>
+                      <a:headEnd type="none" w="med" len="med"/>
+                      <a:tailEnd type="none" w="med" len="med"/>
+                    </a:lnT>
+                    <a:lnB w="6350" cap="flat" cmpd="sng" algn="ctr">
+                      <a:solidFill>
+                        <a:srgbClr val="E5E2DC"/>
+                      </a:solidFill>
+                      <a:prstDash val="solid"/>
+                      <a:round/>
+                      <a:headEnd type="none" w="med" len="med"/>
+                      <a:tailEnd type="none" w="med" len="med"/>
+                    </a:lnB>
+                  </a:tcPr>
+                </a:tc>
+              </a:tr>
+            </a:tbl>
+          </a:graphicData>
+        </a:graphic>
+      </p:graphicFrame>
     </p:spTree>
   </p:cSld>
   <p:clrMapOvr>
